--- a/AGENTIC AI & VOICE AGENTS.pptx
+++ b/AGENTIC AI & VOICE AGENTS.pptx
@@ -5,18 +5,22 @@
     <p:sldMasterId id="2147483648" r:id="rId1"/>
   </p:sldMasterIdLst>
   <p:notesMasterIdLst>
-    <p:notesMasterId r:id="rId11"/>
+    <p:notesMasterId r:id="rId15"/>
   </p:notesMasterIdLst>
   <p:sldIdLst>
     <p:sldId id="292" r:id="rId2"/>
     <p:sldId id="284" r:id="rId3"/>
-    <p:sldId id="286" r:id="rId4"/>
-    <p:sldId id="285" r:id="rId5"/>
-    <p:sldId id="287" r:id="rId6"/>
-    <p:sldId id="288" r:id="rId7"/>
-    <p:sldId id="289" r:id="rId8"/>
-    <p:sldId id="290" r:id="rId9"/>
-    <p:sldId id="291" r:id="rId10"/>
+    <p:sldId id="300" r:id="rId4"/>
+    <p:sldId id="301" r:id="rId5"/>
+    <p:sldId id="302" r:id="rId6"/>
+    <p:sldId id="303" r:id="rId7"/>
+    <p:sldId id="285" r:id="rId8"/>
+    <p:sldId id="287" r:id="rId9"/>
+    <p:sldId id="288" r:id="rId10"/>
+    <p:sldId id="289" r:id="rId11"/>
+    <p:sldId id="290" r:id="rId12"/>
+    <p:sldId id="293" r:id="rId13"/>
+    <p:sldId id="291" r:id="rId14"/>
   </p:sldIdLst>
   <p:sldSz cx="12192000" cy="6858000"/>
   <p:notesSz cx="6858000" cy="12192000"/>
@@ -311,6 +315,426 @@
             <a:fld id="{F7021451-1387-4CA6-816F-3879F97B5CBC}" type="slidenum">
               <a:rPr lang="en-US"/>
               <a:t>1</a:t>
+            </a:fld>
+            <a:endParaRPr lang="en-US"/>
+          </a:p>
+        </p:txBody>
+      </p:sp>
+    </p:spTree>
+    <p:extLst>
+      <p:ext uri="{BB962C8B-B14F-4D97-AF65-F5344CB8AC3E}">
+        <p14:creationId xmlns:p14="http://schemas.microsoft.com/office/powerpoint/2010/main" val="1024086991"/>
+      </p:ext>
+    </p:extLst>
+  </p:cSld>
+  <p:clrMapOvr>
+    <a:masterClrMapping/>
+  </p:clrMapOvr>
+</p:notes>
+</file>
+
+<file path=ppt/notesSlides/notesSlide10.xml><?xml version="1.0" encoding="utf-8"?>
+<p:notes xmlns:a="http://schemas.openxmlformats.org/drawingml/2006/main" xmlns:r="http://schemas.openxmlformats.org/officeDocument/2006/relationships" xmlns:p="http://schemas.openxmlformats.org/presentationml/2006/main">
+  <p:cSld>
+    <p:spTree>
+      <p:nvGrpSpPr>
+        <p:cNvPr id="1" name=""/>
+        <p:cNvGrpSpPr/>
+        <p:nvPr/>
+      </p:nvGrpSpPr>
+      <p:grpSpPr>
+        <a:xfrm>
+          <a:off x="0" y="0"/>
+          <a:ext cx="0" cy="0"/>
+          <a:chOff x="0" y="0"/>
+          <a:chExt cx="0" cy="0"/>
+        </a:xfrm>
+      </p:grpSpPr>
+      <p:sp>
+        <p:nvSpPr>
+          <p:cNvPr id="2" name="Slide Image Placeholder 1"/>
+          <p:cNvSpPr>
+            <a:spLocks noGrp="1" noRot="1" noChangeAspect="1"/>
+          </p:cNvSpPr>
+          <p:nvPr>
+            <p:ph type="sldImg"/>
+          </p:nvPr>
+        </p:nvSpPr>
+        <p:spPr/>
+      </p:sp>
+      <p:sp>
+        <p:nvSpPr>
+          <p:cNvPr id="3" name="Notes Placeholder 2"/>
+          <p:cNvSpPr>
+            <a:spLocks noGrp="1"/>
+          </p:cNvSpPr>
+          <p:nvPr>
+            <p:ph type="body" idx="1"/>
+          </p:nvPr>
+        </p:nvSpPr>
+        <p:spPr/>
+        <p:txBody>
+          <a:bodyPr/>
+          <a:lstStyle/>
+          <a:p>
+            <a:endParaRPr lang="en-US" dirty="0"/>
+          </a:p>
+        </p:txBody>
+      </p:sp>
+      <p:sp>
+        <p:nvSpPr>
+          <p:cNvPr id="4" name="Slide Number Placeholder 3"/>
+          <p:cNvSpPr>
+            <a:spLocks noGrp="1"/>
+          </p:cNvSpPr>
+          <p:nvPr>
+            <p:ph type="sldNum" sz="quarter" idx="10"/>
+          </p:nvPr>
+        </p:nvSpPr>
+        <p:spPr/>
+        <p:txBody>
+          <a:bodyPr/>
+          <a:lstStyle/>
+          <a:p>
+            <a:fld id="{F7021451-1387-4CA6-816F-3879F97B5CBC}" type="slidenum">
+              <a:rPr lang="en-US"/>
+              <a:t>10</a:t>
+            </a:fld>
+            <a:endParaRPr lang="en-US"/>
+          </a:p>
+        </p:txBody>
+      </p:sp>
+    </p:spTree>
+    <p:extLst>
+      <p:ext uri="{BB962C8B-B14F-4D97-AF65-F5344CB8AC3E}">
+        <p14:creationId xmlns:p14="http://schemas.microsoft.com/office/powerpoint/2010/main" val="1024086991"/>
+      </p:ext>
+    </p:extLst>
+  </p:cSld>
+  <p:clrMapOvr>
+    <a:masterClrMapping/>
+  </p:clrMapOvr>
+</p:notes>
+</file>
+
+<file path=ppt/notesSlides/notesSlide11.xml><?xml version="1.0" encoding="utf-8"?>
+<p:notes xmlns:a="http://schemas.openxmlformats.org/drawingml/2006/main" xmlns:r="http://schemas.openxmlformats.org/officeDocument/2006/relationships" xmlns:p="http://schemas.openxmlformats.org/presentationml/2006/main">
+  <p:cSld>
+    <p:spTree>
+      <p:nvGrpSpPr>
+        <p:cNvPr id="1" name=""/>
+        <p:cNvGrpSpPr/>
+        <p:nvPr/>
+      </p:nvGrpSpPr>
+      <p:grpSpPr>
+        <a:xfrm>
+          <a:off x="0" y="0"/>
+          <a:ext cx="0" cy="0"/>
+          <a:chOff x="0" y="0"/>
+          <a:chExt cx="0" cy="0"/>
+        </a:xfrm>
+      </p:grpSpPr>
+      <p:sp>
+        <p:nvSpPr>
+          <p:cNvPr id="2" name="Slide Image Placeholder 1"/>
+          <p:cNvSpPr>
+            <a:spLocks noGrp="1" noRot="1" noChangeAspect="1"/>
+          </p:cNvSpPr>
+          <p:nvPr>
+            <p:ph type="sldImg"/>
+          </p:nvPr>
+        </p:nvSpPr>
+        <p:spPr/>
+      </p:sp>
+      <p:sp>
+        <p:nvSpPr>
+          <p:cNvPr id="3" name="Notes Placeholder 2"/>
+          <p:cNvSpPr>
+            <a:spLocks noGrp="1"/>
+          </p:cNvSpPr>
+          <p:nvPr>
+            <p:ph type="body" idx="1"/>
+          </p:nvPr>
+        </p:nvSpPr>
+        <p:spPr/>
+        <p:txBody>
+          <a:bodyPr/>
+          <a:lstStyle/>
+          <a:p>
+            <a:endParaRPr lang="en-US" dirty="0"/>
+          </a:p>
+        </p:txBody>
+      </p:sp>
+      <p:sp>
+        <p:nvSpPr>
+          <p:cNvPr id="4" name="Slide Number Placeholder 3"/>
+          <p:cNvSpPr>
+            <a:spLocks noGrp="1"/>
+          </p:cNvSpPr>
+          <p:nvPr>
+            <p:ph type="sldNum" sz="quarter" idx="10"/>
+          </p:nvPr>
+        </p:nvSpPr>
+        <p:spPr/>
+        <p:txBody>
+          <a:bodyPr/>
+          <a:lstStyle/>
+          <a:p>
+            <a:fld id="{F7021451-1387-4CA6-816F-3879F97B5CBC}" type="slidenum">
+              <a:rPr lang="en-US"/>
+              <a:t>11</a:t>
+            </a:fld>
+            <a:endParaRPr lang="en-US"/>
+          </a:p>
+        </p:txBody>
+      </p:sp>
+    </p:spTree>
+    <p:extLst>
+      <p:ext uri="{BB962C8B-B14F-4D97-AF65-F5344CB8AC3E}">
+        <p14:creationId xmlns:p14="http://schemas.microsoft.com/office/powerpoint/2010/main" val="1024086991"/>
+      </p:ext>
+    </p:extLst>
+  </p:cSld>
+  <p:clrMapOvr>
+    <a:masterClrMapping/>
+  </p:clrMapOvr>
+</p:notes>
+</file>
+
+<file path=ppt/notesSlides/notesSlide12.xml><?xml version="1.0" encoding="utf-8"?>
+<p:notes xmlns:a="http://schemas.openxmlformats.org/drawingml/2006/main" xmlns:r="http://schemas.openxmlformats.org/officeDocument/2006/relationships" xmlns:p="http://schemas.openxmlformats.org/presentationml/2006/main">
+  <p:cSld>
+    <p:spTree>
+      <p:nvGrpSpPr>
+        <p:cNvPr id="1" name="">
+          <a:extLst>
+            <a:ext uri="{FF2B5EF4-FFF2-40B4-BE49-F238E27FC236}">
+              <a16:creationId xmlns:a16="http://schemas.microsoft.com/office/drawing/2014/main" id="{E7F4BC48-C368-D729-7870-C271867E8D8D}"/>
+            </a:ext>
+          </a:extLst>
+        </p:cNvPr>
+        <p:cNvGrpSpPr/>
+        <p:nvPr/>
+      </p:nvGrpSpPr>
+      <p:grpSpPr>
+        <a:xfrm>
+          <a:off x="0" y="0"/>
+          <a:ext cx="0" cy="0"/>
+          <a:chOff x="0" y="0"/>
+          <a:chExt cx="0" cy="0"/>
+        </a:xfrm>
+      </p:grpSpPr>
+      <p:sp>
+        <p:nvSpPr>
+          <p:cNvPr id="2" name="Slide Image Placeholder 1">
+            <a:extLst>
+              <a:ext uri="{FF2B5EF4-FFF2-40B4-BE49-F238E27FC236}">
+                <a16:creationId xmlns:a16="http://schemas.microsoft.com/office/drawing/2014/main" id="{CD789BD5-9F74-68C3-731F-9C3BF7753D7E}"/>
+              </a:ext>
+            </a:extLst>
+          </p:cNvPr>
+          <p:cNvSpPr>
+            <a:spLocks noGrp="1" noRot="1" noChangeAspect="1"/>
+          </p:cNvSpPr>
+          <p:nvPr>
+            <p:ph type="sldImg"/>
+          </p:nvPr>
+        </p:nvSpPr>
+        <p:spPr/>
+      </p:sp>
+      <p:sp>
+        <p:nvSpPr>
+          <p:cNvPr id="3" name="Notes Placeholder 2">
+            <a:extLst>
+              <a:ext uri="{FF2B5EF4-FFF2-40B4-BE49-F238E27FC236}">
+                <a16:creationId xmlns:a16="http://schemas.microsoft.com/office/drawing/2014/main" id="{DBB32488-48E9-E8EF-301E-90B3448CFA0A}"/>
+              </a:ext>
+            </a:extLst>
+          </p:cNvPr>
+          <p:cNvSpPr>
+            <a:spLocks noGrp="1"/>
+          </p:cNvSpPr>
+          <p:nvPr>
+            <p:ph type="body" idx="1"/>
+          </p:nvPr>
+        </p:nvSpPr>
+        <p:spPr/>
+        <p:txBody>
+          <a:bodyPr/>
+          <a:lstStyle/>
+          <a:p>
+            <a:endParaRPr lang="en-US" dirty="0"/>
+          </a:p>
+        </p:txBody>
+      </p:sp>
+      <p:sp>
+        <p:nvSpPr>
+          <p:cNvPr id="4" name="Slide Number Placeholder 3">
+            <a:extLst>
+              <a:ext uri="{FF2B5EF4-FFF2-40B4-BE49-F238E27FC236}">
+                <a16:creationId xmlns:a16="http://schemas.microsoft.com/office/drawing/2014/main" id="{4D6B3074-918A-61F3-4E6C-7FCEBF22A819}"/>
+              </a:ext>
+            </a:extLst>
+          </p:cNvPr>
+          <p:cNvSpPr>
+            <a:spLocks noGrp="1"/>
+          </p:cNvSpPr>
+          <p:nvPr>
+            <p:ph type="sldNum" sz="quarter" idx="10"/>
+          </p:nvPr>
+        </p:nvSpPr>
+        <p:spPr/>
+        <p:txBody>
+          <a:bodyPr/>
+          <a:lstStyle/>
+          <a:p>
+            <a:pPr marL="0" marR="0" lvl="0" indent="0" algn="l" defTabSz="914400" rtl="0" eaLnBrk="1" fontAlgn="auto" latinLnBrk="0" hangingPunct="1">
+              <a:lnSpc>
+                <a:spcPct val="100000"/>
+              </a:lnSpc>
+              <a:spcBef>
+                <a:spcPts val="0"/>
+              </a:spcBef>
+              <a:spcAft>
+                <a:spcPts val="0"/>
+              </a:spcAft>
+              <a:buClrTx/>
+              <a:buSzTx/>
+              <a:buFontTx/>
+              <a:buNone/>
+              <a:tabLst/>
+              <a:defRPr/>
+            </a:pPr>
+            <a:fld id="{F7021451-1387-4CA6-816F-3879F97B5CBC}" type="slidenum">
+              <a:rPr kumimoji="0" lang="en-US" sz="1800" b="0" i="0" u="none" strike="noStrike" kern="1200" cap="none" spc="0" normalizeH="0" baseline="0" noProof="0">
+                <a:ln>
+                  <a:noFill/>
+                </a:ln>
+                <a:solidFill>
+                  <a:prstClr val="black"/>
+                </a:solidFill>
+                <a:effectLst/>
+                <a:uLnTx/>
+                <a:uFillTx/>
+                <a:latin typeface="Calibri" panose="020F0502020204030204"/>
+                <a:ea typeface="+mn-ea"/>
+                <a:cs typeface="+mn-cs"/>
+              </a:rPr>
+              <a:pPr marL="0" marR="0" lvl="0" indent="0" algn="l" defTabSz="914400" rtl="0" eaLnBrk="1" fontAlgn="auto" latinLnBrk="0" hangingPunct="1">
+                <a:lnSpc>
+                  <a:spcPct val="100000"/>
+                </a:lnSpc>
+                <a:spcBef>
+                  <a:spcPts val="0"/>
+                </a:spcBef>
+                <a:spcAft>
+                  <a:spcPts val="0"/>
+                </a:spcAft>
+                <a:buClrTx/>
+                <a:buSzTx/>
+                <a:buFontTx/>
+                <a:buNone/>
+                <a:tabLst/>
+                <a:defRPr/>
+              </a:pPr>
+              <a:t>12</a:t>
+            </a:fld>
+            <a:endParaRPr kumimoji="0" lang="en-US" sz="1800" b="0" i="0" u="none" strike="noStrike" kern="1200" cap="none" spc="0" normalizeH="0" baseline="0" noProof="0">
+              <a:ln>
+                <a:noFill/>
+              </a:ln>
+              <a:solidFill>
+                <a:prstClr val="black"/>
+              </a:solidFill>
+              <a:effectLst/>
+              <a:uLnTx/>
+              <a:uFillTx/>
+              <a:latin typeface="Calibri" panose="020F0502020204030204"/>
+              <a:ea typeface="+mn-ea"/>
+              <a:cs typeface="+mn-cs"/>
+            </a:endParaRPr>
+          </a:p>
+        </p:txBody>
+      </p:sp>
+    </p:spTree>
+    <p:extLst>
+      <p:ext uri="{BB962C8B-B14F-4D97-AF65-F5344CB8AC3E}">
+        <p14:creationId xmlns:p14="http://schemas.microsoft.com/office/powerpoint/2010/main" val="3095101141"/>
+      </p:ext>
+    </p:extLst>
+  </p:cSld>
+  <p:clrMapOvr>
+    <a:masterClrMapping/>
+  </p:clrMapOvr>
+</p:notes>
+</file>
+
+<file path=ppt/notesSlides/notesSlide13.xml><?xml version="1.0" encoding="utf-8"?>
+<p:notes xmlns:a="http://schemas.openxmlformats.org/drawingml/2006/main" xmlns:r="http://schemas.openxmlformats.org/officeDocument/2006/relationships" xmlns:p="http://schemas.openxmlformats.org/presentationml/2006/main">
+  <p:cSld>
+    <p:spTree>
+      <p:nvGrpSpPr>
+        <p:cNvPr id="1" name=""/>
+        <p:cNvGrpSpPr/>
+        <p:nvPr/>
+      </p:nvGrpSpPr>
+      <p:grpSpPr>
+        <a:xfrm>
+          <a:off x="0" y="0"/>
+          <a:ext cx="0" cy="0"/>
+          <a:chOff x="0" y="0"/>
+          <a:chExt cx="0" cy="0"/>
+        </a:xfrm>
+      </p:grpSpPr>
+      <p:sp>
+        <p:nvSpPr>
+          <p:cNvPr id="2" name="Slide Image Placeholder 1"/>
+          <p:cNvSpPr>
+            <a:spLocks noGrp="1" noRot="1" noChangeAspect="1"/>
+          </p:cNvSpPr>
+          <p:nvPr>
+            <p:ph type="sldImg"/>
+          </p:nvPr>
+        </p:nvSpPr>
+        <p:spPr/>
+      </p:sp>
+      <p:sp>
+        <p:nvSpPr>
+          <p:cNvPr id="3" name="Notes Placeholder 2"/>
+          <p:cNvSpPr>
+            <a:spLocks noGrp="1"/>
+          </p:cNvSpPr>
+          <p:nvPr>
+            <p:ph type="body" idx="1"/>
+          </p:nvPr>
+        </p:nvSpPr>
+        <p:spPr/>
+        <p:txBody>
+          <a:bodyPr/>
+          <a:lstStyle/>
+          <a:p>
+            <a:endParaRPr lang="en-US" dirty="0"/>
+          </a:p>
+        </p:txBody>
+      </p:sp>
+      <p:sp>
+        <p:nvSpPr>
+          <p:cNvPr id="4" name="Slide Number Placeholder 3"/>
+          <p:cNvSpPr>
+            <a:spLocks noGrp="1"/>
+          </p:cNvSpPr>
+          <p:nvPr>
+            <p:ph type="sldNum" sz="quarter" idx="10"/>
+          </p:nvPr>
+        </p:nvSpPr>
+        <p:spPr/>
+        <p:txBody>
+          <a:bodyPr/>
+          <a:lstStyle/>
+          <a:p>
+            <a:fld id="{F7021451-1387-4CA6-816F-3879F97B5CBC}" type="slidenum">
+              <a:rPr lang="en-US"/>
+              <a:t>13</a:t>
             </a:fld>
             <a:endParaRPr lang="en-US"/>
           </a:p>
@@ -1538,6 +1962,1340 @@
 </p:sld>
 </file>
 
+<file path=ppt/slides/slide10.xml><?xml version="1.0" encoding="utf-8"?>
+<p:sld xmlns:a="http://schemas.openxmlformats.org/drawingml/2006/main" xmlns:r="http://schemas.openxmlformats.org/officeDocument/2006/relationships" xmlns:p="http://schemas.openxmlformats.org/presentationml/2006/main">
+  <p:cSld name="Slide 11">
+    <p:bg>
+      <p:bgPr>
+        <a:solidFill>
+          <a:srgbClr val="0F1320">
+            <a:alpha val="100000"/>
+          </a:srgbClr>
+        </a:solidFill>
+        <a:effectLst/>
+      </p:bgPr>
+    </p:bg>
+    <p:spTree>
+      <p:nvGrpSpPr>
+        <p:cNvPr id="1" name=""/>
+        <p:cNvGrpSpPr/>
+        <p:nvPr/>
+      </p:nvGrpSpPr>
+      <p:grpSpPr>
+        <a:xfrm>
+          <a:off x="0" y="0"/>
+          <a:ext cx="0" cy="0"/>
+          <a:chOff x="0" y="0"/>
+          <a:chExt cx="0" cy="0"/>
+        </a:xfrm>
+      </p:grpSpPr>
+      <p:sp>
+        <p:nvSpPr>
+          <p:cNvPr id="2" name="Text 0"/>
+          <p:cNvSpPr/>
+          <p:nvPr/>
+        </p:nvSpPr>
+        <p:spPr>
+          <a:xfrm>
+            <a:off x="548640" y="457200"/>
+            <a:ext cx="7315200" cy="365760"/>
+          </a:xfrm>
+          <a:prstGeom prst="rect">
+            <a:avLst/>
+          </a:prstGeom>
+          <a:noFill/>
+          <a:ln/>
+        </p:spPr>
+        <p:txBody>
+          <a:bodyPr wrap="square" rtlCol="0" anchor="ctr"/>
+          <a:lstStyle/>
+          <a:p>
+            <a:pPr marL="0" indent="0">
+              <a:buNone/>
+            </a:pPr>
+            <a:r>
+              <a:rPr lang="en-US" sz="1300" b="1" kern="0" spc="200" dirty="0">
+                <a:solidFill>
+                  <a:srgbClr val="22D3EE"/>
+                </a:solidFill>
+                <a:latin typeface="Calibri" pitchFamily="34" charset="0"/>
+                <a:ea typeface="Calibri" pitchFamily="34" charset="-122"/>
+                <a:cs typeface="Calibri" pitchFamily="34" charset="-120"/>
+              </a:rPr>
+              <a:t>TOOLING</a:t>
+            </a:r>
+            <a:endParaRPr lang="en-US" sz="1300" dirty="0"/>
+          </a:p>
+        </p:txBody>
+      </p:sp>
+      <p:sp>
+        <p:nvSpPr>
+          <p:cNvPr id="3" name="Text 1"/>
+          <p:cNvSpPr/>
+          <p:nvPr/>
+        </p:nvSpPr>
+        <p:spPr>
+          <a:xfrm>
+            <a:off x="548640" y="822960"/>
+            <a:ext cx="10789920" cy="914400"/>
+          </a:xfrm>
+          <a:prstGeom prst="rect">
+            <a:avLst/>
+          </a:prstGeom>
+          <a:noFill/>
+          <a:ln/>
+        </p:spPr>
+        <p:txBody>
+          <a:bodyPr wrap="square" rtlCol="0" anchor="ctr"/>
+          <a:lstStyle/>
+          <a:p>
+            <a:pPr marL="0" indent="0">
+              <a:buNone/>
+            </a:pPr>
+            <a:r>
+              <a:rPr lang="en-US" sz="3400" b="1" dirty="0">
+                <a:solidFill>
+                  <a:srgbClr val="E8ECF7"/>
+                </a:solidFill>
+                <a:latin typeface="Cambria" pitchFamily="34" charset="0"/>
+                <a:ea typeface="Cambria" pitchFamily="34" charset="-122"/>
+                <a:cs typeface="Cambria" pitchFamily="34" charset="-120"/>
+              </a:rPr>
+              <a:t>Why LiveKit</a:t>
+            </a:r>
+            <a:endParaRPr lang="en-US" sz="3400" dirty="0"/>
+          </a:p>
+        </p:txBody>
+      </p:sp>
+      <p:sp>
+        <p:nvSpPr>
+          <p:cNvPr id="4" name="Text 2"/>
+          <p:cNvSpPr/>
+          <p:nvPr/>
+        </p:nvSpPr>
+        <p:spPr>
+          <a:xfrm>
+            <a:off x="548640" y="1965960"/>
+            <a:ext cx="10881360" cy="914400"/>
+          </a:xfrm>
+          <a:prstGeom prst="rect">
+            <a:avLst/>
+          </a:prstGeom>
+          <a:noFill/>
+          <a:ln/>
+        </p:spPr>
+        <p:txBody>
+          <a:bodyPr wrap="square" rtlCol="0" anchor="ctr"/>
+          <a:lstStyle/>
+          <a:p>
+            <a:pPr marL="0" indent="0">
+              <a:buNone/>
+            </a:pPr>
+            <a:r>
+              <a:rPr lang="en-US" sz="1600" dirty="0">
+                <a:solidFill>
+                  <a:srgbClr val="A9B2C9"/>
+                </a:solidFill>
+                <a:latin typeface="Calibri" pitchFamily="34" charset="0"/>
+                <a:ea typeface="Calibri" pitchFamily="34" charset="-122"/>
+                <a:cs typeface="Calibri" pitchFamily="34" charset="-120"/>
+              </a:rPr>
+              <a:t>LiveKit wires the whole pipeline together — the real-time audio connection between you and your agent, plus a framework to plug in any STT, LLM, or TTS provider.</a:t>
+            </a:r>
+            <a:endParaRPr lang="en-US" sz="1600" dirty="0"/>
+          </a:p>
+        </p:txBody>
+      </p:sp>
+      <p:sp>
+        <p:nvSpPr>
+          <p:cNvPr id="5" name="Shape 3"/>
+          <p:cNvSpPr/>
+          <p:nvPr/>
+        </p:nvSpPr>
+        <p:spPr>
+          <a:xfrm>
+            <a:off x="548640" y="3108960"/>
+            <a:ext cx="3520440" cy="2377440"/>
+          </a:xfrm>
+          <a:prstGeom prst="roundRect">
+            <a:avLst>
+              <a:gd name="adj" fmla="val 3846"/>
+            </a:avLst>
+          </a:prstGeom>
+          <a:solidFill>
+            <a:srgbClr val="1A2142"/>
+          </a:solidFill>
+          <a:ln>
+            <a:noFill/>
+          </a:ln>
+        </p:spPr>
+        <p:txBody>
+          <a:bodyPr/>
+          <a:lstStyle/>
+          <a:p>
+            <a:endParaRPr lang="en-IN"/>
+          </a:p>
+        </p:txBody>
+      </p:sp>
+      <p:sp>
+        <p:nvSpPr>
+          <p:cNvPr id="6" name="Text 4"/>
+          <p:cNvSpPr/>
+          <p:nvPr/>
+        </p:nvSpPr>
+        <p:spPr>
+          <a:xfrm>
+            <a:off x="777240" y="3337560"/>
+            <a:ext cx="3063240" cy="548640"/>
+          </a:xfrm>
+          <a:prstGeom prst="rect">
+            <a:avLst/>
+          </a:prstGeom>
+          <a:noFill/>
+          <a:ln/>
+        </p:spPr>
+        <p:txBody>
+          <a:bodyPr wrap="square" rtlCol="0" anchor="ctr"/>
+          <a:lstStyle/>
+          <a:p>
+            <a:pPr marL="0" indent="0">
+              <a:buNone/>
+            </a:pPr>
+            <a:r>
+              <a:rPr lang="en-US" sz="1700" b="1" dirty="0">
+                <a:solidFill>
+                  <a:srgbClr val="22D3EE"/>
+                </a:solidFill>
+                <a:latin typeface="Calibri" pitchFamily="34" charset="0"/>
+                <a:ea typeface="Calibri" pitchFamily="34" charset="-122"/>
+                <a:cs typeface="Calibri" pitchFamily="34" charset="-120"/>
+              </a:rPr>
+              <a:t>Free to start</a:t>
+            </a:r>
+            <a:endParaRPr lang="en-US" sz="1700" dirty="0"/>
+          </a:p>
+        </p:txBody>
+      </p:sp>
+      <p:sp>
+        <p:nvSpPr>
+          <p:cNvPr id="7" name="Text 5"/>
+          <p:cNvSpPr/>
+          <p:nvPr/>
+        </p:nvSpPr>
+        <p:spPr>
+          <a:xfrm>
+            <a:off x="777240" y="3931920"/>
+            <a:ext cx="3063240" cy="1371600"/>
+          </a:xfrm>
+          <a:prstGeom prst="rect">
+            <a:avLst/>
+          </a:prstGeom>
+          <a:noFill/>
+          <a:ln/>
+        </p:spPr>
+        <p:txBody>
+          <a:bodyPr wrap="square" rtlCol="0" anchor="t"/>
+          <a:lstStyle/>
+          <a:p>
+            <a:pPr marL="0" indent="0">
+              <a:buNone/>
+            </a:pPr>
+            <a:r>
+              <a:rPr lang="en-US" sz="1350" dirty="0">
+                <a:solidFill>
+                  <a:srgbClr val="DCE6EF"/>
+                </a:solidFill>
+                <a:latin typeface="Calibri" pitchFamily="34" charset="0"/>
+                <a:ea typeface="Calibri" pitchFamily="34" charset="-122"/>
+                <a:cs typeface="Calibri" pitchFamily="34" charset="-120"/>
+              </a:rPr>
+              <a:t>No credit card needed for the free tier.</a:t>
+            </a:r>
+            <a:endParaRPr lang="en-US" sz="1350" dirty="0"/>
+          </a:p>
+        </p:txBody>
+      </p:sp>
+      <p:sp>
+        <p:nvSpPr>
+          <p:cNvPr id="8" name="Shape 6"/>
+          <p:cNvSpPr/>
+          <p:nvPr/>
+        </p:nvSpPr>
+        <p:spPr>
+          <a:xfrm>
+            <a:off x="4297680" y="3108960"/>
+            <a:ext cx="3520440" cy="2377440"/>
+          </a:xfrm>
+          <a:prstGeom prst="roundRect">
+            <a:avLst>
+              <a:gd name="adj" fmla="val 3846"/>
+            </a:avLst>
+          </a:prstGeom>
+          <a:solidFill>
+            <a:srgbClr val="1A2142"/>
+          </a:solidFill>
+          <a:ln>
+            <a:noFill/>
+          </a:ln>
+        </p:spPr>
+        <p:txBody>
+          <a:bodyPr/>
+          <a:lstStyle/>
+          <a:p>
+            <a:endParaRPr lang="en-IN"/>
+          </a:p>
+        </p:txBody>
+      </p:sp>
+      <p:sp>
+        <p:nvSpPr>
+          <p:cNvPr id="9" name="Text 7"/>
+          <p:cNvSpPr/>
+          <p:nvPr/>
+        </p:nvSpPr>
+        <p:spPr>
+          <a:xfrm>
+            <a:off x="4526280" y="3337560"/>
+            <a:ext cx="3063240" cy="548640"/>
+          </a:xfrm>
+          <a:prstGeom prst="rect">
+            <a:avLst/>
+          </a:prstGeom>
+          <a:noFill/>
+          <a:ln/>
+        </p:spPr>
+        <p:txBody>
+          <a:bodyPr wrap="square" rtlCol="0" anchor="ctr"/>
+          <a:lstStyle/>
+          <a:p>
+            <a:pPr marL="0" indent="0">
+              <a:buNone/>
+            </a:pPr>
+            <a:r>
+              <a:rPr lang="en-US" sz="1700" b="1" dirty="0">
+                <a:solidFill>
+                  <a:srgbClr val="22D3EE"/>
+                </a:solidFill>
+                <a:latin typeface="Calibri" pitchFamily="34" charset="0"/>
+                <a:ea typeface="Calibri" pitchFamily="34" charset="-122"/>
+                <a:cs typeface="Calibri" pitchFamily="34" charset="-120"/>
+              </a:rPr>
+              <a:t>Browser-based testing</a:t>
+            </a:r>
+            <a:endParaRPr lang="en-US" sz="1700" dirty="0"/>
+          </a:p>
+        </p:txBody>
+      </p:sp>
+      <p:sp>
+        <p:nvSpPr>
+          <p:cNvPr id="10" name="Text 8"/>
+          <p:cNvSpPr/>
+          <p:nvPr/>
+        </p:nvSpPr>
+        <p:spPr>
+          <a:xfrm>
+            <a:off x="4526280" y="3931920"/>
+            <a:ext cx="3063240" cy="1371600"/>
+          </a:xfrm>
+          <a:prstGeom prst="rect">
+            <a:avLst/>
+          </a:prstGeom>
+          <a:noFill/>
+          <a:ln/>
+        </p:spPr>
+        <p:txBody>
+          <a:bodyPr wrap="square" rtlCol="0" anchor="t"/>
+          <a:lstStyle/>
+          <a:p>
+            <a:pPr marL="0" indent="0">
+              <a:buNone/>
+            </a:pPr>
+            <a:r>
+              <a:rPr lang="en-US" sz="1350" dirty="0">
+                <a:solidFill>
+                  <a:srgbClr val="DCE6EF"/>
+                </a:solidFill>
+                <a:latin typeface="Calibri" pitchFamily="34" charset="0"/>
+                <a:ea typeface="Calibri" pitchFamily="34" charset="-122"/>
+                <a:cs typeface="Calibri" pitchFamily="34" charset="-120"/>
+              </a:rPr>
+              <a:t>Agents Playground — talk to your agent with just a mic.</a:t>
+            </a:r>
+            <a:endParaRPr lang="en-US" sz="1350" dirty="0"/>
+          </a:p>
+        </p:txBody>
+      </p:sp>
+      <p:sp>
+        <p:nvSpPr>
+          <p:cNvPr id="11" name="Shape 9"/>
+          <p:cNvSpPr/>
+          <p:nvPr/>
+        </p:nvSpPr>
+        <p:spPr>
+          <a:xfrm>
+            <a:off x="8046720" y="3108960"/>
+            <a:ext cx="3520440" cy="2377440"/>
+          </a:xfrm>
+          <a:prstGeom prst="roundRect">
+            <a:avLst>
+              <a:gd name="adj" fmla="val 3846"/>
+            </a:avLst>
+          </a:prstGeom>
+          <a:solidFill>
+            <a:srgbClr val="1A2142"/>
+          </a:solidFill>
+          <a:ln>
+            <a:noFill/>
+          </a:ln>
+        </p:spPr>
+        <p:txBody>
+          <a:bodyPr/>
+          <a:lstStyle/>
+          <a:p>
+            <a:endParaRPr lang="en-IN"/>
+          </a:p>
+        </p:txBody>
+      </p:sp>
+      <p:sp>
+        <p:nvSpPr>
+          <p:cNvPr id="12" name="Text 10"/>
+          <p:cNvSpPr/>
+          <p:nvPr/>
+        </p:nvSpPr>
+        <p:spPr>
+          <a:xfrm>
+            <a:off x="8275320" y="3337560"/>
+            <a:ext cx="3063240" cy="548640"/>
+          </a:xfrm>
+          <a:prstGeom prst="rect">
+            <a:avLst/>
+          </a:prstGeom>
+          <a:noFill/>
+          <a:ln/>
+        </p:spPr>
+        <p:txBody>
+          <a:bodyPr wrap="square" rtlCol="0" anchor="ctr"/>
+          <a:lstStyle/>
+          <a:p>
+            <a:pPr marL="0" indent="0">
+              <a:buNone/>
+            </a:pPr>
+            <a:r>
+              <a:rPr lang="en-US" sz="1700" b="1" dirty="0">
+                <a:solidFill>
+                  <a:srgbClr val="22D3EE"/>
+                </a:solidFill>
+                <a:latin typeface="Calibri" pitchFamily="34" charset="0"/>
+                <a:ea typeface="Calibri" pitchFamily="34" charset="-122"/>
+                <a:cs typeface="Calibri" pitchFamily="34" charset="-120"/>
+              </a:rPr>
+              <a:t>Production-grade</a:t>
+            </a:r>
+            <a:endParaRPr lang="en-US" sz="1700" dirty="0"/>
+          </a:p>
+        </p:txBody>
+      </p:sp>
+      <p:sp>
+        <p:nvSpPr>
+          <p:cNvPr id="13" name="Text 11"/>
+          <p:cNvSpPr/>
+          <p:nvPr/>
+        </p:nvSpPr>
+        <p:spPr>
+          <a:xfrm>
+            <a:off x="8275320" y="3931920"/>
+            <a:ext cx="3063240" cy="1371600"/>
+          </a:xfrm>
+          <a:prstGeom prst="rect">
+            <a:avLst/>
+          </a:prstGeom>
+          <a:noFill/>
+          <a:ln/>
+        </p:spPr>
+        <p:txBody>
+          <a:bodyPr wrap="square" rtlCol="0" anchor="t"/>
+          <a:lstStyle/>
+          <a:p>
+            <a:pPr marL="0" indent="0">
+              <a:buNone/>
+            </a:pPr>
+            <a:r>
+              <a:rPr lang="en-US" sz="1350" dirty="0">
+                <a:solidFill>
+                  <a:srgbClr val="DCE6EF"/>
+                </a:solidFill>
+                <a:latin typeface="Calibri" pitchFamily="34" charset="0"/>
+                <a:ea typeface="Calibri" pitchFamily="34" charset="-122"/>
+                <a:cs typeface="Calibri" pitchFamily="34" charset="-120"/>
+              </a:rPr>
+              <a:t>The same framework powering real deployed voice agents.</a:t>
+            </a:r>
+            <a:endParaRPr lang="en-US" sz="1350" dirty="0"/>
+          </a:p>
+        </p:txBody>
+      </p:sp>
+      <p:sp>
+        <p:nvSpPr>
+          <p:cNvPr id="14" name="Text 12"/>
+          <p:cNvSpPr/>
+          <p:nvPr/>
+        </p:nvSpPr>
+        <p:spPr>
+          <a:xfrm>
+            <a:off x="548640" y="6492240"/>
+            <a:ext cx="7315200" cy="274320"/>
+          </a:xfrm>
+          <a:prstGeom prst="rect">
+            <a:avLst/>
+          </a:prstGeom>
+          <a:noFill/>
+          <a:ln/>
+        </p:spPr>
+        <p:txBody>
+          <a:bodyPr wrap="square" rtlCol="0" anchor="ctr"/>
+          <a:lstStyle/>
+          <a:p>
+            <a:pPr marL="0" indent="0">
+              <a:buNone/>
+            </a:pPr>
+            <a:r>
+              <a:rPr lang="en-US" sz="900" dirty="0">
+                <a:solidFill>
+                  <a:srgbClr val="A9B2C9"/>
+                </a:solidFill>
+                <a:latin typeface="Calibri" pitchFamily="34" charset="0"/>
+                <a:ea typeface="Calibri" pitchFamily="34" charset="-122"/>
+                <a:cs typeface="Calibri" pitchFamily="34" charset="-120"/>
+              </a:rPr>
+              <a:t>Agentic AI &amp; Voice Agents Workshop</a:t>
+            </a:r>
+            <a:endParaRPr lang="en-US" sz="900" dirty="0"/>
+          </a:p>
+        </p:txBody>
+      </p:sp>
+      <p:sp>
+        <p:nvSpPr>
+          <p:cNvPr id="15" name="Text 13"/>
+          <p:cNvSpPr/>
+          <p:nvPr/>
+        </p:nvSpPr>
+        <p:spPr>
+          <a:xfrm>
+            <a:off x="11521440" y="6492240"/>
+            <a:ext cx="365760" cy="274320"/>
+          </a:xfrm>
+          <a:prstGeom prst="rect">
+            <a:avLst/>
+          </a:prstGeom>
+          <a:noFill/>
+          <a:ln/>
+        </p:spPr>
+        <p:txBody>
+          <a:bodyPr wrap="square" rtlCol="0" anchor="ctr"/>
+          <a:lstStyle/>
+          <a:p>
+            <a:pPr marL="0" indent="0" algn="r">
+              <a:buNone/>
+            </a:pPr>
+            <a:r>
+              <a:rPr lang="en-US" sz="900" dirty="0">
+                <a:solidFill>
+                  <a:srgbClr val="A9B2C9"/>
+                </a:solidFill>
+                <a:latin typeface="Calibri" pitchFamily="34" charset="0"/>
+                <a:ea typeface="Calibri" pitchFamily="34" charset="-122"/>
+                <a:cs typeface="Calibri" pitchFamily="34" charset="-120"/>
+              </a:rPr>
+              <a:t>11</a:t>
+            </a:r>
+            <a:endParaRPr lang="en-US" sz="900" dirty="0"/>
+          </a:p>
+        </p:txBody>
+      </p:sp>
+    </p:spTree>
+    <p:extLst>
+      <p:ext uri="{BB962C8B-B14F-4D97-AF65-F5344CB8AC3E}">
+        <p14:creationId xmlns:p14="http://schemas.microsoft.com/office/powerpoint/2010/main" val="2627132905"/>
+      </p:ext>
+    </p:extLst>
+  </p:cSld>
+  <p:clrMapOvr>
+    <a:masterClrMapping/>
+  </p:clrMapOvr>
+</p:sld>
+</file>
+
+<file path=ppt/slides/slide11.xml><?xml version="1.0" encoding="utf-8"?>
+<p:sld xmlns:a="http://schemas.openxmlformats.org/drawingml/2006/main" xmlns:r="http://schemas.openxmlformats.org/officeDocument/2006/relationships" xmlns:p="http://schemas.openxmlformats.org/presentationml/2006/main">
+  <p:cSld name="Slide 12">
+    <p:bg>
+      <p:bgPr>
+        <a:solidFill>
+          <a:srgbClr val="0F1320">
+            <a:alpha val="100000"/>
+          </a:srgbClr>
+        </a:solidFill>
+        <a:effectLst/>
+      </p:bgPr>
+    </p:bg>
+    <p:spTree>
+      <p:nvGrpSpPr>
+        <p:cNvPr id="1" name=""/>
+        <p:cNvGrpSpPr/>
+        <p:nvPr/>
+      </p:nvGrpSpPr>
+      <p:grpSpPr>
+        <a:xfrm>
+          <a:off x="0" y="0"/>
+          <a:ext cx="0" cy="0"/>
+          <a:chOff x="0" y="0"/>
+          <a:chExt cx="0" cy="0"/>
+        </a:xfrm>
+      </p:grpSpPr>
+      <p:sp>
+        <p:nvSpPr>
+          <p:cNvPr id="2" name="Text 0"/>
+          <p:cNvSpPr/>
+          <p:nvPr/>
+        </p:nvSpPr>
+        <p:spPr>
+          <a:xfrm>
+            <a:off x="548640" y="457200"/>
+            <a:ext cx="7315200" cy="365760"/>
+          </a:xfrm>
+          <a:prstGeom prst="rect">
+            <a:avLst/>
+          </a:prstGeom>
+          <a:noFill/>
+          <a:ln/>
+        </p:spPr>
+        <p:txBody>
+          <a:bodyPr wrap="square" rtlCol="0" anchor="ctr"/>
+          <a:lstStyle/>
+          <a:p>
+            <a:pPr marL="0" indent="0">
+              <a:buNone/>
+            </a:pPr>
+            <a:r>
+              <a:rPr lang="en-US" sz="1300" b="1" kern="0" spc="200" dirty="0">
+                <a:solidFill>
+                  <a:srgbClr val="22D3EE"/>
+                </a:solidFill>
+                <a:latin typeface="Calibri" pitchFamily="34" charset="0"/>
+                <a:ea typeface="Calibri" pitchFamily="34" charset="-122"/>
+                <a:cs typeface="Calibri" pitchFamily="34" charset="-120"/>
+              </a:rPr>
+              <a:t>TODAY'S HANDS-ON</a:t>
+            </a:r>
+            <a:endParaRPr lang="en-US" sz="1300" dirty="0"/>
+          </a:p>
+        </p:txBody>
+      </p:sp>
+      <p:sp>
+        <p:nvSpPr>
+          <p:cNvPr id="3" name="Text 1"/>
+          <p:cNvSpPr/>
+          <p:nvPr/>
+        </p:nvSpPr>
+        <p:spPr>
+          <a:xfrm>
+            <a:off x="548640" y="822960"/>
+            <a:ext cx="10789920" cy="914400"/>
+          </a:xfrm>
+          <a:prstGeom prst="rect">
+            <a:avLst/>
+          </a:prstGeom>
+          <a:noFill/>
+          <a:ln/>
+        </p:spPr>
+        <p:txBody>
+          <a:bodyPr wrap="square" rtlCol="0" anchor="ctr"/>
+          <a:lstStyle/>
+          <a:p>
+            <a:pPr marL="0" indent="0">
+              <a:buNone/>
+            </a:pPr>
+            <a:r>
+              <a:rPr lang="en-US" sz="3400" b="1" dirty="0">
+                <a:solidFill>
+                  <a:srgbClr val="E8ECF7"/>
+                </a:solidFill>
+                <a:latin typeface="Cambria" pitchFamily="34" charset="0"/>
+                <a:ea typeface="Cambria" pitchFamily="34" charset="-122"/>
+                <a:cs typeface="Cambria" pitchFamily="34" charset="-120"/>
+              </a:rPr>
+              <a:t>Your Repo for Today</a:t>
+            </a:r>
+            <a:endParaRPr lang="en-US" sz="3400" dirty="0"/>
+          </a:p>
+        </p:txBody>
+      </p:sp>
+      <p:sp>
+        <p:nvSpPr>
+          <p:cNvPr id="25" name="Text 23"/>
+          <p:cNvSpPr/>
+          <p:nvPr/>
+        </p:nvSpPr>
+        <p:spPr>
+          <a:xfrm>
+            <a:off x="548640" y="6492240"/>
+            <a:ext cx="7315200" cy="274320"/>
+          </a:xfrm>
+          <a:prstGeom prst="rect">
+            <a:avLst/>
+          </a:prstGeom>
+          <a:noFill/>
+          <a:ln/>
+        </p:spPr>
+        <p:txBody>
+          <a:bodyPr wrap="square" rtlCol="0" anchor="ctr"/>
+          <a:lstStyle/>
+          <a:p>
+            <a:pPr marL="0" indent="0">
+              <a:buNone/>
+            </a:pPr>
+            <a:r>
+              <a:rPr lang="en-US" sz="900" dirty="0">
+                <a:solidFill>
+                  <a:srgbClr val="A9B2C9"/>
+                </a:solidFill>
+                <a:latin typeface="Calibri" pitchFamily="34" charset="0"/>
+                <a:ea typeface="Calibri" pitchFamily="34" charset="-122"/>
+                <a:cs typeface="Calibri" pitchFamily="34" charset="-120"/>
+              </a:rPr>
+              <a:t>Agentic AI &amp; Voice Agents Workshop</a:t>
+            </a:r>
+            <a:endParaRPr lang="en-US" sz="900" dirty="0"/>
+          </a:p>
+        </p:txBody>
+      </p:sp>
+      <p:sp>
+        <p:nvSpPr>
+          <p:cNvPr id="26" name="Text 24"/>
+          <p:cNvSpPr/>
+          <p:nvPr/>
+        </p:nvSpPr>
+        <p:spPr>
+          <a:xfrm>
+            <a:off x="11521440" y="6492240"/>
+            <a:ext cx="365760" cy="274320"/>
+          </a:xfrm>
+          <a:prstGeom prst="rect">
+            <a:avLst/>
+          </a:prstGeom>
+          <a:noFill/>
+          <a:ln/>
+        </p:spPr>
+        <p:txBody>
+          <a:bodyPr wrap="square" rtlCol="0" anchor="ctr"/>
+          <a:lstStyle/>
+          <a:p>
+            <a:pPr marL="0" indent="0" algn="r">
+              <a:buNone/>
+            </a:pPr>
+            <a:r>
+              <a:rPr lang="en-US" sz="900" dirty="0">
+                <a:solidFill>
+                  <a:srgbClr val="A9B2C9"/>
+                </a:solidFill>
+                <a:latin typeface="Calibri" pitchFamily="34" charset="0"/>
+                <a:ea typeface="Calibri" pitchFamily="34" charset="-122"/>
+                <a:cs typeface="Calibri" pitchFamily="34" charset="-120"/>
+              </a:rPr>
+              <a:t>12</a:t>
+            </a:r>
+            <a:endParaRPr lang="en-US" sz="900" dirty="0"/>
+          </a:p>
+        </p:txBody>
+      </p:sp>
+      <p:pic>
+        <p:nvPicPr>
+          <p:cNvPr id="28" name="Picture 27">
+            <a:extLst>
+              <a:ext uri="{FF2B5EF4-FFF2-40B4-BE49-F238E27FC236}">
+                <a16:creationId xmlns:a16="http://schemas.microsoft.com/office/drawing/2014/main" id="{D54EF76A-2D47-C19B-F4DD-A9C172D0B2A5}"/>
+              </a:ext>
+            </a:extLst>
+          </p:cNvPr>
+          <p:cNvPicPr>
+            <a:picLocks noChangeAspect="1"/>
+          </p:cNvPicPr>
+          <p:nvPr/>
+        </p:nvPicPr>
+        <p:blipFill>
+          <a:blip r:embed="rId3"/>
+          <a:stretch>
+            <a:fillRect/>
+          </a:stretch>
+        </p:blipFill>
+        <p:spPr>
+          <a:xfrm>
+            <a:off x="3771900" y="1950720"/>
+            <a:ext cx="4343400" cy="4343400"/>
+          </a:xfrm>
+          <a:prstGeom prst="rect">
+            <a:avLst/>
+          </a:prstGeom>
+        </p:spPr>
+      </p:pic>
+    </p:spTree>
+    <p:extLst>
+      <p:ext uri="{BB962C8B-B14F-4D97-AF65-F5344CB8AC3E}">
+        <p14:creationId xmlns:p14="http://schemas.microsoft.com/office/powerpoint/2010/main" val="3372542555"/>
+      </p:ext>
+    </p:extLst>
+  </p:cSld>
+  <p:clrMapOvr>
+    <a:masterClrMapping/>
+  </p:clrMapOvr>
+</p:sld>
+</file>
+
+<file path=ppt/slides/slide12.xml><?xml version="1.0" encoding="utf-8"?>
+<p:sld xmlns:a="http://schemas.openxmlformats.org/drawingml/2006/main" xmlns:r="http://schemas.openxmlformats.org/officeDocument/2006/relationships" xmlns:p="http://schemas.openxmlformats.org/presentationml/2006/main">
+  <p:cSld>
+    <p:bg>
+      <p:bgPr>
+        <a:solidFill>
+          <a:srgbClr val="0F1320">
+            <a:alpha val="100000"/>
+          </a:srgbClr>
+        </a:solidFill>
+        <a:effectLst/>
+      </p:bgPr>
+    </p:bg>
+    <p:spTree>
+      <p:nvGrpSpPr>
+        <p:cNvPr id="1" name="">
+          <a:extLst>
+            <a:ext uri="{FF2B5EF4-FFF2-40B4-BE49-F238E27FC236}">
+              <a16:creationId xmlns:a16="http://schemas.microsoft.com/office/drawing/2014/main" id="{F36E1D69-FABA-F255-62A7-EDD2980D4685}"/>
+            </a:ext>
+          </a:extLst>
+        </p:cNvPr>
+        <p:cNvGrpSpPr/>
+        <p:nvPr/>
+      </p:nvGrpSpPr>
+      <p:grpSpPr>
+        <a:xfrm>
+          <a:off x="0" y="0"/>
+          <a:ext cx="0" cy="0"/>
+          <a:chOff x="0" y="0"/>
+          <a:chExt cx="0" cy="0"/>
+        </a:xfrm>
+      </p:grpSpPr>
+      <p:sp>
+        <p:nvSpPr>
+          <p:cNvPr id="2" name="Text 0">
+            <a:extLst>
+              <a:ext uri="{FF2B5EF4-FFF2-40B4-BE49-F238E27FC236}">
+                <a16:creationId xmlns:a16="http://schemas.microsoft.com/office/drawing/2014/main" id="{DAF5302E-0C3F-BADD-EE62-6B41FEF8F4BF}"/>
+              </a:ext>
+            </a:extLst>
+          </p:cNvPr>
+          <p:cNvSpPr/>
+          <p:nvPr/>
+        </p:nvSpPr>
+        <p:spPr>
+          <a:xfrm>
+            <a:off x="548640" y="457200"/>
+            <a:ext cx="7315200" cy="365760"/>
+          </a:xfrm>
+          <a:prstGeom prst="rect">
+            <a:avLst/>
+          </a:prstGeom>
+          <a:noFill/>
+          <a:ln/>
+        </p:spPr>
+        <p:txBody>
+          <a:bodyPr wrap="square" rtlCol="0" anchor="ctr"/>
+          <a:lstStyle/>
+          <a:p>
+            <a:pPr marL="0" marR="0" lvl="0" indent="0" algn="l" defTabSz="914400" rtl="0" eaLnBrk="1" fontAlgn="auto" latinLnBrk="0" hangingPunct="1">
+              <a:lnSpc>
+                <a:spcPct val="100000"/>
+              </a:lnSpc>
+              <a:spcBef>
+                <a:spcPts val="0"/>
+              </a:spcBef>
+              <a:spcAft>
+                <a:spcPts val="0"/>
+              </a:spcAft>
+              <a:buClrTx/>
+              <a:buSzTx/>
+              <a:buFontTx/>
+              <a:buNone/>
+              <a:tabLst/>
+              <a:defRPr/>
+            </a:pPr>
+            <a:r>
+              <a:rPr kumimoji="0" lang="en-US" sz="1300" b="1" i="0" u="none" strike="noStrike" kern="0" cap="none" spc="200" normalizeH="0" baseline="0" noProof="0" dirty="0">
+                <a:ln>
+                  <a:noFill/>
+                </a:ln>
+                <a:solidFill>
+                  <a:srgbClr val="22D3EE"/>
+                </a:solidFill>
+                <a:effectLst/>
+                <a:uLnTx/>
+                <a:uFillTx/>
+                <a:latin typeface="Calibri" pitchFamily="34" charset="0"/>
+                <a:ea typeface="Calibri" pitchFamily="34" charset="-122"/>
+                <a:cs typeface="Calibri" pitchFamily="34" charset="-120"/>
+              </a:rPr>
+              <a:t>TODAY'S HANDS-ON</a:t>
+            </a:r>
+            <a:endParaRPr kumimoji="0" lang="en-US" sz="1300" b="0" i="0" u="none" strike="noStrike" kern="1200" cap="none" spc="0" normalizeH="0" baseline="0" noProof="0" dirty="0">
+              <a:ln>
+                <a:noFill/>
+              </a:ln>
+              <a:solidFill>
+                <a:prstClr val="black"/>
+              </a:solidFill>
+              <a:effectLst/>
+              <a:uLnTx/>
+              <a:uFillTx/>
+              <a:latin typeface="Calibri" panose="020F0502020204030204"/>
+              <a:ea typeface="+mn-ea"/>
+              <a:cs typeface="+mn-cs"/>
+            </a:endParaRPr>
+          </a:p>
+        </p:txBody>
+      </p:sp>
+      <p:sp>
+        <p:nvSpPr>
+          <p:cNvPr id="3" name="Text 1">
+            <a:extLst>
+              <a:ext uri="{FF2B5EF4-FFF2-40B4-BE49-F238E27FC236}">
+                <a16:creationId xmlns:a16="http://schemas.microsoft.com/office/drawing/2014/main" id="{E3F3F2D8-3A0D-7ECB-D72C-113F62A25E40}"/>
+              </a:ext>
+            </a:extLst>
+          </p:cNvPr>
+          <p:cNvSpPr/>
+          <p:nvPr/>
+        </p:nvSpPr>
+        <p:spPr>
+          <a:xfrm>
+            <a:off x="548640" y="822960"/>
+            <a:ext cx="10789920" cy="914400"/>
+          </a:xfrm>
+          <a:prstGeom prst="rect">
+            <a:avLst/>
+          </a:prstGeom>
+          <a:noFill/>
+          <a:ln/>
+        </p:spPr>
+        <p:txBody>
+          <a:bodyPr wrap="square" rtlCol="0" anchor="ctr"/>
+          <a:lstStyle/>
+          <a:p>
+            <a:pPr marL="0" marR="0" lvl="0" indent="0" algn="l" defTabSz="914400" rtl="0" eaLnBrk="1" fontAlgn="auto" latinLnBrk="0" hangingPunct="1">
+              <a:lnSpc>
+                <a:spcPct val="100000"/>
+              </a:lnSpc>
+              <a:spcBef>
+                <a:spcPts val="0"/>
+              </a:spcBef>
+              <a:spcAft>
+                <a:spcPts val="0"/>
+              </a:spcAft>
+              <a:buClrTx/>
+              <a:buSzTx/>
+              <a:buFontTx/>
+              <a:buNone/>
+              <a:tabLst/>
+              <a:defRPr/>
+            </a:pPr>
+            <a:r>
+              <a:rPr kumimoji="0" lang="en-US" sz="3400" b="1" i="0" u="none" strike="noStrike" kern="1200" cap="none" spc="0" normalizeH="0" baseline="0" noProof="0" dirty="0">
+                <a:ln>
+                  <a:noFill/>
+                </a:ln>
+                <a:solidFill>
+                  <a:srgbClr val="E8ECF7"/>
+                </a:solidFill>
+                <a:effectLst/>
+                <a:uLnTx/>
+                <a:uFillTx/>
+                <a:latin typeface="Cambria" pitchFamily="34" charset="0"/>
+                <a:ea typeface="Cambria" pitchFamily="34" charset="-122"/>
+                <a:cs typeface="Cambria" pitchFamily="34" charset="-120"/>
+              </a:rPr>
+              <a:t>Drop your ideas !!!</a:t>
+            </a:r>
+            <a:endParaRPr kumimoji="0" lang="en-US" sz="3400" b="0" i="0" u="none" strike="noStrike" kern="1200" cap="none" spc="0" normalizeH="0" baseline="0" noProof="0" dirty="0">
+              <a:ln>
+                <a:noFill/>
+              </a:ln>
+              <a:solidFill>
+                <a:prstClr val="black"/>
+              </a:solidFill>
+              <a:effectLst/>
+              <a:uLnTx/>
+              <a:uFillTx/>
+              <a:latin typeface="Calibri" panose="020F0502020204030204"/>
+              <a:ea typeface="+mn-ea"/>
+              <a:cs typeface="+mn-cs"/>
+            </a:endParaRPr>
+          </a:p>
+        </p:txBody>
+      </p:sp>
+      <p:sp>
+        <p:nvSpPr>
+          <p:cNvPr id="25" name="Text 23">
+            <a:extLst>
+              <a:ext uri="{FF2B5EF4-FFF2-40B4-BE49-F238E27FC236}">
+                <a16:creationId xmlns:a16="http://schemas.microsoft.com/office/drawing/2014/main" id="{58EF6F8F-E219-E5AF-44CB-EFDDF99E1A0C}"/>
+              </a:ext>
+            </a:extLst>
+          </p:cNvPr>
+          <p:cNvSpPr/>
+          <p:nvPr/>
+        </p:nvSpPr>
+        <p:spPr>
+          <a:xfrm>
+            <a:off x="548640" y="6492240"/>
+            <a:ext cx="7315200" cy="274320"/>
+          </a:xfrm>
+          <a:prstGeom prst="rect">
+            <a:avLst/>
+          </a:prstGeom>
+          <a:noFill/>
+          <a:ln/>
+        </p:spPr>
+        <p:txBody>
+          <a:bodyPr wrap="square" rtlCol="0" anchor="ctr"/>
+          <a:lstStyle/>
+          <a:p>
+            <a:pPr marL="0" marR="0" lvl="0" indent="0" algn="l" defTabSz="914400" rtl="0" eaLnBrk="1" fontAlgn="auto" latinLnBrk="0" hangingPunct="1">
+              <a:lnSpc>
+                <a:spcPct val="100000"/>
+              </a:lnSpc>
+              <a:spcBef>
+                <a:spcPts val="0"/>
+              </a:spcBef>
+              <a:spcAft>
+                <a:spcPts val="0"/>
+              </a:spcAft>
+              <a:buClrTx/>
+              <a:buSzTx/>
+              <a:buFontTx/>
+              <a:buNone/>
+              <a:tabLst/>
+              <a:defRPr/>
+            </a:pPr>
+            <a:r>
+              <a:rPr kumimoji="0" lang="en-US" sz="900" b="0" i="0" u="none" strike="noStrike" kern="1200" cap="none" spc="0" normalizeH="0" baseline="0" noProof="0" dirty="0">
+                <a:ln>
+                  <a:noFill/>
+                </a:ln>
+                <a:solidFill>
+                  <a:srgbClr val="A9B2C9"/>
+                </a:solidFill>
+                <a:effectLst/>
+                <a:uLnTx/>
+                <a:uFillTx/>
+                <a:latin typeface="Calibri" pitchFamily="34" charset="0"/>
+                <a:ea typeface="Calibri" pitchFamily="34" charset="-122"/>
+                <a:cs typeface="Calibri" pitchFamily="34" charset="-120"/>
+              </a:rPr>
+              <a:t>Agentic AI &amp; Voice Agents Workshop</a:t>
+            </a:r>
+            <a:endParaRPr kumimoji="0" lang="en-US" sz="900" b="0" i="0" u="none" strike="noStrike" kern="1200" cap="none" spc="0" normalizeH="0" baseline="0" noProof="0" dirty="0">
+              <a:ln>
+                <a:noFill/>
+              </a:ln>
+              <a:solidFill>
+                <a:prstClr val="black"/>
+              </a:solidFill>
+              <a:effectLst/>
+              <a:uLnTx/>
+              <a:uFillTx/>
+              <a:latin typeface="Calibri" panose="020F0502020204030204"/>
+              <a:ea typeface="+mn-ea"/>
+              <a:cs typeface="+mn-cs"/>
+            </a:endParaRPr>
+          </a:p>
+        </p:txBody>
+      </p:sp>
+      <p:sp>
+        <p:nvSpPr>
+          <p:cNvPr id="26" name="Text 24">
+            <a:extLst>
+              <a:ext uri="{FF2B5EF4-FFF2-40B4-BE49-F238E27FC236}">
+                <a16:creationId xmlns:a16="http://schemas.microsoft.com/office/drawing/2014/main" id="{C8DD05BB-6673-6007-E8FA-38FFE4AA2885}"/>
+              </a:ext>
+            </a:extLst>
+          </p:cNvPr>
+          <p:cNvSpPr/>
+          <p:nvPr/>
+        </p:nvSpPr>
+        <p:spPr>
+          <a:xfrm>
+            <a:off x="11521440" y="6492240"/>
+            <a:ext cx="365760" cy="274320"/>
+          </a:xfrm>
+          <a:prstGeom prst="rect">
+            <a:avLst/>
+          </a:prstGeom>
+          <a:noFill/>
+          <a:ln/>
+        </p:spPr>
+        <p:txBody>
+          <a:bodyPr wrap="square" rtlCol="0" anchor="ctr"/>
+          <a:lstStyle/>
+          <a:p>
+            <a:pPr marL="0" marR="0" lvl="0" indent="0" algn="r" defTabSz="914400" rtl="0" eaLnBrk="1" fontAlgn="auto" latinLnBrk="0" hangingPunct="1">
+              <a:lnSpc>
+                <a:spcPct val="100000"/>
+              </a:lnSpc>
+              <a:spcBef>
+                <a:spcPts val="0"/>
+              </a:spcBef>
+              <a:spcAft>
+                <a:spcPts val="0"/>
+              </a:spcAft>
+              <a:buClrTx/>
+              <a:buSzTx/>
+              <a:buFontTx/>
+              <a:buNone/>
+              <a:tabLst/>
+              <a:defRPr/>
+            </a:pPr>
+            <a:r>
+              <a:rPr kumimoji="0" lang="en-US" sz="900" b="0" i="0" u="none" strike="noStrike" kern="1200" cap="none" spc="0" normalizeH="0" baseline="0" noProof="0" dirty="0">
+                <a:ln>
+                  <a:noFill/>
+                </a:ln>
+                <a:solidFill>
+                  <a:srgbClr val="A9B2C9"/>
+                </a:solidFill>
+                <a:effectLst/>
+                <a:uLnTx/>
+                <a:uFillTx/>
+                <a:latin typeface="Calibri" pitchFamily="34" charset="0"/>
+                <a:ea typeface="Calibri" pitchFamily="34" charset="-122"/>
+                <a:cs typeface="Calibri" pitchFamily="34" charset="-120"/>
+              </a:rPr>
+              <a:t>12</a:t>
+            </a:r>
+            <a:endParaRPr kumimoji="0" lang="en-US" sz="900" b="0" i="0" u="none" strike="noStrike" kern="1200" cap="none" spc="0" normalizeH="0" baseline="0" noProof="0" dirty="0">
+              <a:ln>
+                <a:noFill/>
+              </a:ln>
+              <a:solidFill>
+                <a:prstClr val="black"/>
+              </a:solidFill>
+              <a:effectLst/>
+              <a:uLnTx/>
+              <a:uFillTx/>
+              <a:latin typeface="Calibri" panose="020F0502020204030204"/>
+              <a:ea typeface="+mn-ea"/>
+              <a:cs typeface="+mn-cs"/>
+            </a:endParaRPr>
+          </a:p>
+        </p:txBody>
+      </p:sp>
+      <p:pic>
+        <p:nvPicPr>
+          <p:cNvPr id="5" name="Picture 4">
+            <a:extLst>
+              <a:ext uri="{FF2B5EF4-FFF2-40B4-BE49-F238E27FC236}">
+                <a16:creationId xmlns:a16="http://schemas.microsoft.com/office/drawing/2014/main" id="{85016F04-4CA9-3926-CCFD-7319D9FA23F6}"/>
+              </a:ext>
+            </a:extLst>
+          </p:cNvPr>
+          <p:cNvPicPr>
+            <a:picLocks noChangeAspect="1"/>
+          </p:cNvPicPr>
+          <p:nvPr/>
+        </p:nvPicPr>
+        <p:blipFill>
+          <a:blip r:embed="rId3"/>
+          <a:stretch>
+            <a:fillRect/>
+          </a:stretch>
+        </p:blipFill>
+        <p:spPr>
+          <a:xfrm>
+            <a:off x="4293978" y="1626978"/>
+            <a:ext cx="3604044" cy="3604044"/>
+          </a:xfrm>
+          <a:prstGeom prst="rect">
+            <a:avLst/>
+          </a:prstGeom>
+        </p:spPr>
+      </p:pic>
+    </p:spTree>
+    <p:extLst>
+      <p:ext uri="{BB962C8B-B14F-4D97-AF65-F5344CB8AC3E}">
+        <p14:creationId xmlns:p14="http://schemas.microsoft.com/office/powerpoint/2010/main" val="4066803147"/>
+      </p:ext>
+    </p:extLst>
+  </p:cSld>
+  <p:clrMapOvr>
+    <a:masterClrMapping/>
+  </p:clrMapOvr>
+</p:sld>
+</file>
+
+<file path=ppt/slides/slide13.xml><?xml version="1.0" encoding="utf-8"?>
+<p:sld xmlns:a="http://schemas.openxmlformats.org/drawingml/2006/main" xmlns:r="http://schemas.openxmlformats.org/officeDocument/2006/relationships" xmlns:p="http://schemas.openxmlformats.org/presentationml/2006/main">
+  <p:cSld name="Slide 16">
+    <p:bg>
+      <p:bgPr>
+        <a:solidFill>
+          <a:srgbClr val="0B0E1A">
+            <a:alpha val="100000"/>
+          </a:srgbClr>
+        </a:solidFill>
+        <a:effectLst/>
+      </p:bgPr>
+    </p:bg>
+    <p:spTree>
+      <p:nvGrpSpPr>
+        <p:cNvPr id="1" name=""/>
+        <p:cNvGrpSpPr/>
+        <p:nvPr/>
+      </p:nvGrpSpPr>
+      <p:grpSpPr>
+        <a:xfrm>
+          <a:off x="0" y="0"/>
+          <a:ext cx="0" cy="0"/>
+          <a:chOff x="0" y="0"/>
+          <a:chExt cx="0" cy="0"/>
+        </a:xfrm>
+      </p:grpSpPr>
+      <p:sp>
+        <p:nvSpPr>
+          <p:cNvPr id="2" name="Text 0"/>
+          <p:cNvSpPr/>
+          <p:nvPr/>
+        </p:nvSpPr>
+        <p:spPr>
+          <a:xfrm>
+            <a:off x="731520" y="2651760"/>
+            <a:ext cx="10698480" cy="1097280"/>
+          </a:xfrm>
+          <a:prstGeom prst="rect">
+            <a:avLst/>
+          </a:prstGeom>
+          <a:noFill/>
+          <a:ln/>
+        </p:spPr>
+        <p:txBody>
+          <a:bodyPr wrap="square" rtlCol="0" anchor="ctr"/>
+          <a:lstStyle/>
+          <a:p>
+            <a:pPr marL="0" indent="0">
+              <a:buNone/>
+            </a:pPr>
+            <a:r>
+              <a:rPr lang="en-US" sz="4800" b="1" dirty="0">
+                <a:solidFill>
+                  <a:srgbClr val="FFFFFF"/>
+                </a:solidFill>
+                <a:latin typeface="Cambria" pitchFamily="34" charset="0"/>
+                <a:ea typeface="Cambria" pitchFamily="34" charset="-122"/>
+                <a:cs typeface="Cambria" pitchFamily="34" charset="-120"/>
+              </a:rPr>
+              <a:t>Thank You</a:t>
+            </a:r>
+            <a:endParaRPr lang="en-US" sz="4800" dirty="0"/>
+          </a:p>
+        </p:txBody>
+      </p:sp>
+      <p:sp>
+        <p:nvSpPr>
+          <p:cNvPr id="3" name="Text 1"/>
+          <p:cNvSpPr/>
+          <p:nvPr/>
+        </p:nvSpPr>
+        <p:spPr>
+          <a:xfrm>
+            <a:off x="731520" y="3566160"/>
+            <a:ext cx="10698480" cy="457200"/>
+          </a:xfrm>
+          <a:prstGeom prst="rect">
+            <a:avLst/>
+          </a:prstGeom>
+          <a:noFill/>
+          <a:ln/>
+        </p:spPr>
+        <p:txBody>
+          <a:bodyPr wrap="square" rtlCol="0" anchor="ctr"/>
+          <a:lstStyle/>
+          <a:p>
+            <a:pPr marL="0" indent="0">
+              <a:buNone/>
+            </a:pPr>
+            <a:r>
+              <a:rPr lang="en-US" sz="1800" dirty="0">
+                <a:solidFill>
+                  <a:srgbClr val="C3CBE8"/>
+                </a:solidFill>
+                <a:latin typeface="Calibri" pitchFamily="34" charset="0"/>
+                <a:ea typeface="Calibri" pitchFamily="34" charset="-122"/>
+                <a:cs typeface="Calibri" pitchFamily="34" charset="-120"/>
+              </a:rPr>
+              <a:t>Questions? Find me after the session.</a:t>
+            </a:r>
+            <a:endParaRPr lang="en-US" sz="1800" dirty="0"/>
+          </a:p>
+        </p:txBody>
+      </p:sp>
+      <p:sp>
+        <p:nvSpPr>
+          <p:cNvPr id="4" name="Text 2"/>
+          <p:cNvSpPr/>
+          <p:nvPr/>
+        </p:nvSpPr>
+        <p:spPr>
+          <a:xfrm>
+            <a:off x="731520" y="4114800"/>
+            <a:ext cx="10698480" cy="457200"/>
+          </a:xfrm>
+          <a:prstGeom prst="rect">
+            <a:avLst/>
+          </a:prstGeom>
+          <a:noFill/>
+          <a:ln/>
+        </p:spPr>
+        <p:txBody>
+          <a:bodyPr wrap="square" rtlCol="0" anchor="ctr"/>
+          <a:lstStyle/>
+          <a:p>
+            <a:r>
+              <a:rPr lang="en-US" sz="1400" dirty="0">
+                <a:solidFill>
+                  <a:srgbClr val="19859A"/>
+                </a:solidFill>
+                <a:latin typeface="Courier New" pitchFamily="34" charset="0"/>
+                <a:ea typeface="Courier New" pitchFamily="34" charset="-122"/>
+                <a:cs typeface="Courier New" pitchFamily="34" charset="-120"/>
+              </a:rPr>
+              <a:t>https://www.linkedin.com/in/karthikrommula/</a:t>
+            </a:r>
+            <a:endParaRPr lang="en-US" sz="1400" dirty="0">
+              <a:solidFill>
+                <a:srgbClr val="19859A"/>
+              </a:solidFill>
+            </a:endParaRPr>
+          </a:p>
+        </p:txBody>
+      </p:sp>
+    </p:spTree>
+    <p:extLst>
+      <p:ext uri="{BB962C8B-B14F-4D97-AF65-F5344CB8AC3E}">
+        <p14:creationId xmlns:p14="http://schemas.microsoft.com/office/powerpoint/2010/main" val="4138182316"/>
+      </p:ext>
+    </p:extLst>
+  </p:cSld>
+  <p:clrMapOvr>
+    <a:masterClrMapping/>
+  </p:clrMapOvr>
+</p:sld>
+</file>
+
 <file path=ppt/slides/slide2.xml><?xml version="1.0" encoding="utf-8"?>
 <p:sld xmlns:a="http://schemas.openxmlformats.org/drawingml/2006/main" xmlns:r="http://schemas.openxmlformats.org/officeDocument/2006/relationships" xmlns:p="http://schemas.openxmlformats.org/presentationml/2006/main">
   <p:cSld name="Slide 3">
@@ -1668,7 +3426,7 @@
           <a:bodyPr/>
           <a:lstStyle/>
           <a:p>
-            <a:endParaRPr lang="en-IN"/>
+            <a:endParaRPr lang="en-IN" dirty="0"/>
           </a:p>
         </p:txBody>
       </p:sp>
@@ -1744,7 +3502,7 @@
                 <a:ea typeface="Calibri" pitchFamily="34" charset="-122"/>
                 <a:cs typeface="Calibri" pitchFamily="34" charset="-120"/>
               </a:rPr>
-              <a:t>Welcome + About Me + intellioai.in</a:t>
+              <a:t>Welcome + About Me</a:t>
             </a:r>
             <a:endParaRPr lang="en-US" sz="1400" dirty="0"/>
           </a:p>
@@ -1810,9 +3568,6 @@
           <a:bodyPr wrap="square" rtlCol="0" anchor="ctr"/>
           <a:lstStyle/>
           <a:p>
-            <a:pPr marL="0" indent="0">
-              <a:buNone/>
-            </a:pPr>
             <a:r>
               <a:rPr lang="en-US" sz="1400" dirty="0">
                 <a:solidFill>
@@ -1822,7 +3577,7 @@
                 <a:ea typeface="Calibri" pitchFamily="34" charset="-122"/>
                 <a:cs typeface="Calibri" pitchFamily="34" charset="-120"/>
               </a:rPr>
-              <a:t>Startup journey  </a:t>
+              <a:t>intellioai.in + Startup journey  </a:t>
             </a:r>
             <a:endParaRPr lang="en-US" sz="1400" dirty="0"/>
           </a:p>
@@ -2680,7 +4435,7 @@
                 <a:ea typeface="Calibri" pitchFamily="34" charset="-122"/>
                 <a:cs typeface="Calibri" pitchFamily="34" charset="-120"/>
               </a:rPr>
-              <a:t>Start with one problem</a:t>
+              <a:t>Nobody hands you a brief</a:t>
             </a:r>
             <a:endParaRPr lang="en-US" sz="1700" dirty="0"/>
           </a:p>
@@ -2719,7 +4474,7 @@
                 <a:ea typeface="Calibri" pitchFamily="34" charset="-122"/>
                 <a:cs typeface="Calibri" pitchFamily="34" charset="-120"/>
               </a:rPr>
-              <a:t>Not a mission statement — a specific problem, for a specific person.</a:t>
+              <a:t>Direction comes from noticing something that annoys you, not from being assigned it.</a:t>
             </a:r>
             <a:endParaRPr lang="en-US" sz="1350" dirty="0"/>
           </a:p>
@@ -2826,7 +4581,7 @@
                 <a:ea typeface="Calibri" pitchFamily="34" charset="-122"/>
                 <a:cs typeface="Calibri" pitchFamily="34" charset="-120"/>
               </a:rPr>
-              <a:t>Version one will embarrass you</a:t>
+              <a:t>Momentum beats motivation</a:t>
             </a:r>
             <a:endParaRPr lang="en-US" sz="1700" dirty="0"/>
           </a:p>
@@ -2865,7 +4620,7 @@
                 <a:ea typeface="Calibri" pitchFamily="34" charset="-122"/>
                 <a:cs typeface="Calibri" pitchFamily="34" charset="-120"/>
               </a:rPr>
-              <a:t>That's the point. Shipping something rough beats polishing something imaginary.</a:t>
+              <a:t>Half an hour every day compounds faster than a heroic weekend once a month.</a:t>
             </a:r>
             <a:endParaRPr lang="en-US" sz="1350" dirty="0"/>
           </a:p>
@@ -2972,7 +4727,7 @@
                 <a:ea typeface="Calibri" pitchFamily="34" charset="-122"/>
                 <a:cs typeface="Calibri" pitchFamily="34" charset="-120"/>
               </a:rPr>
-              <a:t>Find one real user first</a:t>
+              <a:t>Confusion is part of the job</a:t>
             </a:r>
             <a:endParaRPr lang="en-US" sz="1700" dirty="0"/>
           </a:p>
@@ -3011,7 +4766,7 @@
                 <a:ea typeface="Calibri" pitchFamily="34" charset="-122"/>
                 <a:cs typeface="Calibri" pitchFamily="34" charset="-120"/>
               </a:rPr>
-              <a:t>One real customer teaches you more than a hundred hypothetical ones.</a:t>
+              <a:t>Not knowing the next step is normal. Freezing until it becomes obvious is the real risk.</a:t>
             </a:r>
             <a:endParaRPr lang="en-US" sz="1350" dirty="0"/>
           </a:p>
@@ -3118,7 +4873,7 @@
                 <a:ea typeface="Calibri" pitchFamily="34" charset="-122"/>
                 <a:cs typeface="Calibri" pitchFamily="34" charset="-120"/>
               </a:rPr>
-              <a:t>You don't need permission</a:t>
+              <a:t>Your false starts are invisible</a:t>
             </a:r>
             <a:endParaRPr lang="en-US" sz="1700" dirty="0"/>
           </a:p>
@@ -3157,7 +4912,7 @@
                 <a:ea typeface="Calibri" pitchFamily="34" charset="-122"/>
                 <a:cs typeface="Calibri" pitchFamily="34" charset="-120"/>
               </a:rPr>
-              <a:t>You need a small solution and the willingness to be wrong in public.</a:t>
+              <a:t>The stumbles you replay in your head are the ones nobody else ever notices.</a:t>
             </a:r>
             <a:endParaRPr lang="en-US" sz="1350" dirty="0"/>
           </a:p>
@@ -3244,7 +4999,7 @@
     </p:spTree>
     <p:extLst>
       <p:ext uri="{BB962C8B-B14F-4D97-AF65-F5344CB8AC3E}">
-        <p14:creationId xmlns:p14="http://schemas.microsoft.com/office/powerpoint/2010/main" val="3458439664"/>
+        <p14:creationId xmlns:p14="http://schemas.microsoft.com/office/powerpoint/2010/main" val="2012920932"/>
       </p:ext>
     </p:extLst>
   </p:cSld>
@@ -3255,6 +5010,2346 @@
 </file>
 
 <file path=ppt/slides/slide4.xml><?xml version="1.0" encoding="utf-8"?>
+<p:sld xmlns:a="http://schemas.openxmlformats.org/drawingml/2006/main" xmlns:r="http://schemas.openxmlformats.org/officeDocument/2006/relationships" xmlns:p="http://schemas.openxmlformats.org/presentationml/2006/main">
+  <p:cSld name="Slide 5">
+    <p:bg>
+      <p:bgPr>
+        <a:solidFill>
+          <a:srgbClr val="0F1320">
+            <a:alpha val="100000"/>
+          </a:srgbClr>
+        </a:solidFill>
+        <a:effectLst/>
+      </p:bgPr>
+    </p:bg>
+    <p:spTree>
+      <p:nvGrpSpPr>
+        <p:cNvPr id="1" name=""/>
+        <p:cNvGrpSpPr/>
+        <p:nvPr/>
+      </p:nvGrpSpPr>
+      <p:grpSpPr>
+        <a:xfrm>
+          <a:off x="0" y="0"/>
+          <a:ext cx="0" cy="0"/>
+          <a:chOff x="0" y="0"/>
+          <a:chExt cx="0" cy="0"/>
+        </a:xfrm>
+      </p:grpSpPr>
+      <p:sp>
+        <p:nvSpPr>
+          <p:cNvPr id="2" name="Text 0"/>
+          <p:cNvSpPr/>
+          <p:nvPr/>
+        </p:nvSpPr>
+        <p:spPr>
+          <a:xfrm>
+            <a:off x="548640" y="457200"/>
+            <a:ext cx="7315200" cy="365760"/>
+          </a:xfrm>
+          <a:prstGeom prst="rect">
+            <a:avLst/>
+          </a:prstGeom>
+          <a:noFill/>
+          <a:ln/>
+        </p:spPr>
+        <p:txBody>
+          <a:bodyPr wrap="square" rtlCol="0" anchor="ctr"/>
+          <a:lstStyle/>
+          <a:p>
+            <a:pPr marL="0" indent="0">
+              <a:buNone/>
+            </a:pPr>
+            <a:r>
+              <a:rPr lang="en-US" sz="1300" b="1" kern="0" spc="200" dirty="0">
+                <a:solidFill>
+                  <a:srgbClr val="22D3EE"/>
+                </a:solidFill>
+                <a:latin typeface="Calibri" pitchFamily="34" charset="0"/>
+                <a:ea typeface="Calibri" pitchFamily="34" charset="-122"/>
+                <a:cs typeface="Calibri" pitchFamily="34" charset="-120"/>
+              </a:rPr>
+              <a:t>SETUP &amp; PROBLEM STATEMENT</a:t>
+            </a:r>
+            <a:endParaRPr lang="en-US" sz="1300" dirty="0"/>
+          </a:p>
+        </p:txBody>
+      </p:sp>
+      <p:sp>
+        <p:nvSpPr>
+          <p:cNvPr id="3" name="Text 1"/>
+          <p:cNvSpPr/>
+          <p:nvPr/>
+        </p:nvSpPr>
+        <p:spPr>
+          <a:xfrm>
+            <a:off x="548640" y="822960"/>
+            <a:ext cx="10789920" cy="914400"/>
+          </a:xfrm>
+          <a:prstGeom prst="rect">
+            <a:avLst/>
+          </a:prstGeom>
+          <a:noFill/>
+          <a:ln/>
+        </p:spPr>
+        <p:txBody>
+          <a:bodyPr wrap="square" rtlCol="0" anchor="ctr"/>
+          <a:lstStyle/>
+          <a:p>
+            <a:pPr marL="0" indent="0">
+              <a:buNone/>
+            </a:pPr>
+            <a:r>
+              <a:rPr lang="en-US" sz="3400" b="1" dirty="0">
+                <a:solidFill>
+                  <a:srgbClr val="E8ECF7"/>
+                </a:solidFill>
+                <a:latin typeface="Cambria" pitchFamily="34" charset="0"/>
+                <a:ea typeface="Cambria" pitchFamily="34" charset="-122"/>
+                <a:cs typeface="Cambria" pitchFamily="34" charset="-120"/>
+              </a:rPr>
+              <a:t>Before You Write Any Code</a:t>
+            </a:r>
+            <a:endParaRPr lang="en-US" sz="3400" dirty="0"/>
+          </a:p>
+        </p:txBody>
+      </p:sp>
+      <p:sp>
+        <p:nvSpPr>
+          <p:cNvPr id="4" name="Shape 2"/>
+          <p:cNvSpPr/>
+          <p:nvPr/>
+        </p:nvSpPr>
+        <p:spPr>
+          <a:xfrm>
+            <a:off x="548640" y="2057400"/>
+            <a:ext cx="411480" cy="411480"/>
+          </a:xfrm>
+          <a:prstGeom prst="ellipse">
+            <a:avLst/>
+          </a:prstGeom>
+          <a:solidFill>
+            <a:srgbClr val="4F46E5"/>
+          </a:solidFill>
+          <a:ln>
+            <a:noFill/>
+          </a:ln>
+        </p:spPr>
+        <p:txBody>
+          <a:bodyPr/>
+          <a:lstStyle/>
+          <a:p>
+            <a:endParaRPr lang="en-IN"/>
+          </a:p>
+        </p:txBody>
+      </p:sp>
+      <p:sp>
+        <p:nvSpPr>
+          <p:cNvPr id="5" name="Text 3"/>
+          <p:cNvSpPr/>
+          <p:nvPr/>
+        </p:nvSpPr>
+        <p:spPr>
+          <a:xfrm>
+            <a:off x="548640" y="2057400"/>
+            <a:ext cx="411480" cy="411480"/>
+          </a:xfrm>
+          <a:prstGeom prst="rect">
+            <a:avLst/>
+          </a:prstGeom>
+          <a:noFill/>
+          <a:ln/>
+        </p:spPr>
+        <p:txBody>
+          <a:bodyPr wrap="square" rtlCol="0" anchor="ctr"/>
+          <a:lstStyle/>
+          <a:p>
+            <a:pPr marL="0" indent="0" algn="ctr">
+              <a:buNone/>
+            </a:pPr>
+            <a:r>
+              <a:rPr lang="en-US" sz="1600" b="1" dirty="0">
+                <a:solidFill>
+                  <a:srgbClr val="FFFFFF"/>
+                </a:solidFill>
+                <a:latin typeface="Calibri" pitchFamily="34" charset="0"/>
+                <a:ea typeface="Calibri" pitchFamily="34" charset="-122"/>
+                <a:cs typeface="Calibri" pitchFamily="34" charset="-120"/>
+              </a:rPr>
+              <a:t>→</a:t>
+            </a:r>
+            <a:endParaRPr lang="en-US" sz="1600" dirty="0"/>
+          </a:p>
+        </p:txBody>
+      </p:sp>
+      <p:sp>
+        <p:nvSpPr>
+          <p:cNvPr id="6" name="Text 4"/>
+          <p:cNvSpPr/>
+          <p:nvPr/>
+        </p:nvSpPr>
+        <p:spPr>
+          <a:xfrm>
+            <a:off x="1188720" y="2011680"/>
+            <a:ext cx="10058400" cy="365760"/>
+          </a:xfrm>
+          <a:prstGeom prst="rect">
+            <a:avLst/>
+          </a:prstGeom>
+          <a:noFill/>
+          <a:ln/>
+        </p:spPr>
+        <p:txBody>
+          <a:bodyPr wrap="square" rtlCol="0" anchor="ctr"/>
+          <a:lstStyle/>
+          <a:p>
+            <a:pPr marL="0" indent="0">
+              <a:buNone/>
+            </a:pPr>
+            <a:r>
+              <a:rPr lang="en-US" sz="1700" b="1" dirty="0">
+                <a:solidFill>
+                  <a:srgbClr val="E8ECF7"/>
+                </a:solidFill>
+                <a:latin typeface="Calibri" pitchFamily="34" charset="0"/>
+                <a:ea typeface="Calibri" pitchFamily="34" charset="-122"/>
+                <a:cs typeface="Calibri" pitchFamily="34" charset="-120"/>
+              </a:rPr>
+              <a:t>Start lean, before you're ready</a:t>
+            </a:r>
+            <a:endParaRPr lang="en-US" sz="1700" dirty="0"/>
+          </a:p>
+        </p:txBody>
+      </p:sp>
+      <p:sp>
+        <p:nvSpPr>
+          <p:cNvPr id="7" name="Text 5"/>
+          <p:cNvSpPr/>
+          <p:nvPr/>
+        </p:nvSpPr>
+        <p:spPr>
+          <a:xfrm>
+            <a:off x="1188720" y="2395728"/>
+            <a:ext cx="10058400" cy="457200"/>
+          </a:xfrm>
+          <a:prstGeom prst="rect">
+            <a:avLst/>
+          </a:prstGeom>
+          <a:noFill/>
+          <a:ln/>
+        </p:spPr>
+        <p:txBody>
+          <a:bodyPr wrap="square" rtlCol="0" anchor="ctr"/>
+          <a:lstStyle/>
+          <a:p>
+            <a:pPr marL="0" indent="0">
+              <a:buNone/>
+            </a:pPr>
+            <a:r>
+              <a:rPr lang="en-US" sz="1350" dirty="0">
+                <a:solidFill>
+                  <a:srgbClr val="A9B2C9"/>
+                </a:solidFill>
+                <a:latin typeface="Calibri" pitchFamily="34" charset="0"/>
+                <a:ea typeface="Calibri" pitchFamily="34" charset="-122"/>
+                <a:cs typeface="Calibri" pitchFamily="34" charset="-120"/>
+              </a:rPr>
+              <a:t>Tight constraints force you to think clearly about what actually matters.</a:t>
+            </a:r>
+            <a:endParaRPr lang="en-US" sz="1350" dirty="0"/>
+          </a:p>
+        </p:txBody>
+      </p:sp>
+      <p:sp>
+        <p:nvSpPr>
+          <p:cNvPr id="8" name="Shape 6"/>
+          <p:cNvSpPr/>
+          <p:nvPr/>
+        </p:nvSpPr>
+        <p:spPr>
+          <a:xfrm>
+            <a:off x="548640" y="3108960"/>
+            <a:ext cx="411480" cy="411480"/>
+          </a:xfrm>
+          <a:prstGeom prst="ellipse">
+            <a:avLst/>
+          </a:prstGeom>
+          <a:solidFill>
+            <a:srgbClr val="4F46E5"/>
+          </a:solidFill>
+          <a:ln>
+            <a:noFill/>
+          </a:ln>
+        </p:spPr>
+        <p:txBody>
+          <a:bodyPr/>
+          <a:lstStyle/>
+          <a:p>
+            <a:endParaRPr lang="en-IN"/>
+          </a:p>
+        </p:txBody>
+      </p:sp>
+      <p:sp>
+        <p:nvSpPr>
+          <p:cNvPr id="9" name="Text 7"/>
+          <p:cNvSpPr/>
+          <p:nvPr/>
+        </p:nvSpPr>
+        <p:spPr>
+          <a:xfrm>
+            <a:off x="548640" y="3108960"/>
+            <a:ext cx="411480" cy="411480"/>
+          </a:xfrm>
+          <a:prstGeom prst="rect">
+            <a:avLst/>
+          </a:prstGeom>
+          <a:noFill/>
+          <a:ln/>
+        </p:spPr>
+        <p:txBody>
+          <a:bodyPr wrap="square" rtlCol="0" anchor="ctr"/>
+          <a:lstStyle/>
+          <a:p>
+            <a:pPr marL="0" indent="0" algn="ctr">
+              <a:buNone/>
+            </a:pPr>
+            <a:r>
+              <a:rPr lang="en-US" sz="1600" b="1" dirty="0">
+                <a:solidFill>
+                  <a:srgbClr val="FFFFFF"/>
+                </a:solidFill>
+                <a:latin typeface="Calibri" pitchFamily="34" charset="0"/>
+                <a:ea typeface="Calibri" pitchFamily="34" charset="-122"/>
+                <a:cs typeface="Calibri" pitchFamily="34" charset="-120"/>
+              </a:rPr>
+              <a:t>→</a:t>
+            </a:r>
+            <a:endParaRPr lang="en-US" sz="1600" dirty="0"/>
+          </a:p>
+        </p:txBody>
+      </p:sp>
+      <p:sp>
+        <p:nvSpPr>
+          <p:cNvPr id="10" name="Text 8"/>
+          <p:cNvSpPr/>
+          <p:nvPr/>
+        </p:nvSpPr>
+        <p:spPr>
+          <a:xfrm>
+            <a:off x="1188720" y="3063240"/>
+            <a:ext cx="10058400" cy="365760"/>
+          </a:xfrm>
+          <a:prstGeom prst="rect">
+            <a:avLst/>
+          </a:prstGeom>
+          <a:noFill/>
+          <a:ln/>
+        </p:spPr>
+        <p:txBody>
+          <a:bodyPr wrap="square" rtlCol="0" anchor="ctr"/>
+          <a:lstStyle/>
+          <a:p>
+            <a:pPr marL="0" indent="0">
+              <a:buNone/>
+            </a:pPr>
+            <a:r>
+              <a:rPr lang="en-US" sz="1700" b="1" dirty="0">
+                <a:solidFill>
+                  <a:srgbClr val="E8ECF7"/>
+                </a:solidFill>
+                <a:latin typeface="Calibri" pitchFamily="34" charset="0"/>
+                <a:ea typeface="Calibri" pitchFamily="34" charset="-122"/>
+                <a:cs typeface="Calibri" pitchFamily="34" charset="-120"/>
+              </a:rPr>
+              <a:t>Start with one problem</a:t>
+            </a:r>
+            <a:endParaRPr lang="en-US" sz="1700" dirty="0"/>
+          </a:p>
+        </p:txBody>
+      </p:sp>
+      <p:sp>
+        <p:nvSpPr>
+          <p:cNvPr id="11" name="Text 9"/>
+          <p:cNvSpPr/>
+          <p:nvPr/>
+        </p:nvSpPr>
+        <p:spPr>
+          <a:xfrm>
+            <a:off x="1188720" y="3447288"/>
+            <a:ext cx="10058400" cy="457200"/>
+          </a:xfrm>
+          <a:prstGeom prst="rect">
+            <a:avLst/>
+          </a:prstGeom>
+          <a:noFill/>
+          <a:ln/>
+        </p:spPr>
+        <p:txBody>
+          <a:bodyPr wrap="square" rtlCol="0" anchor="ctr"/>
+          <a:lstStyle/>
+          <a:p>
+            <a:pPr marL="0" indent="0">
+              <a:buNone/>
+            </a:pPr>
+            <a:r>
+              <a:rPr lang="en-US" sz="1350" dirty="0">
+                <a:solidFill>
+                  <a:srgbClr val="A9B2C9"/>
+                </a:solidFill>
+                <a:latin typeface="Calibri" pitchFamily="34" charset="0"/>
+                <a:ea typeface="Calibri" pitchFamily="34" charset="-122"/>
+                <a:cs typeface="Calibri" pitchFamily="34" charset="-120"/>
+              </a:rPr>
+              <a:t>Name the person, name the pain. Vague ambitions cannot be tested.</a:t>
+            </a:r>
+            <a:endParaRPr lang="en-US" sz="1350" dirty="0"/>
+          </a:p>
+        </p:txBody>
+      </p:sp>
+      <p:sp>
+        <p:nvSpPr>
+          <p:cNvPr id="12" name="Shape 10"/>
+          <p:cNvSpPr/>
+          <p:nvPr/>
+        </p:nvSpPr>
+        <p:spPr>
+          <a:xfrm>
+            <a:off x="548640" y="4160520"/>
+            <a:ext cx="411480" cy="411480"/>
+          </a:xfrm>
+          <a:prstGeom prst="ellipse">
+            <a:avLst/>
+          </a:prstGeom>
+          <a:solidFill>
+            <a:srgbClr val="4F46E5"/>
+          </a:solidFill>
+          <a:ln>
+            <a:noFill/>
+          </a:ln>
+        </p:spPr>
+        <p:txBody>
+          <a:bodyPr/>
+          <a:lstStyle/>
+          <a:p>
+            <a:endParaRPr lang="en-IN"/>
+          </a:p>
+        </p:txBody>
+      </p:sp>
+      <p:sp>
+        <p:nvSpPr>
+          <p:cNvPr id="13" name="Text 11"/>
+          <p:cNvSpPr/>
+          <p:nvPr/>
+        </p:nvSpPr>
+        <p:spPr>
+          <a:xfrm>
+            <a:off x="548640" y="4160520"/>
+            <a:ext cx="411480" cy="411480"/>
+          </a:xfrm>
+          <a:prstGeom prst="rect">
+            <a:avLst/>
+          </a:prstGeom>
+          <a:noFill/>
+          <a:ln/>
+        </p:spPr>
+        <p:txBody>
+          <a:bodyPr wrap="square" rtlCol="0" anchor="ctr"/>
+          <a:lstStyle/>
+          <a:p>
+            <a:pPr marL="0" indent="0" algn="ctr">
+              <a:buNone/>
+            </a:pPr>
+            <a:r>
+              <a:rPr lang="en-US" sz="1600" b="1" dirty="0">
+                <a:solidFill>
+                  <a:srgbClr val="FFFFFF"/>
+                </a:solidFill>
+                <a:latin typeface="Calibri" pitchFamily="34" charset="0"/>
+                <a:ea typeface="Calibri" pitchFamily="34" charset="-122"/>
+                <a:cs typeface="Calibri" pitchFamily="34" charset="-120"/>
+              </a:rPr>
+              <a:t>→</a:t>
+            </a:r>
+            <a:endParaRPr lang="en-US" sz="1600" dirty="0"/>
+          </a:p>
+        </p:txBody>
+      </p:sp>
+      <p:sp>
+        <p:nvSpPr>
+          <p:cNvPr id="14" name="Text 12"/>
+          <p:cNvSpPr/>
+          <p:nvPr/>
+        </p:nvSpPr>
+        <p:spPr>
+          <a:xfrm>
+            <a:off x="1188720" y="4114800"/>
+            <a:ext cx="10058400" cy="365760"/>
+          </a:xfrm>
+          <a:prstGeom prst="rect">
+            <a:avLst/>
+          </a:prstGeom>
+          <a:noFill/>
+          <a:ln/>
+        </p:spPr>
+        <p:txBody>
+          <a:bodyPr wrap="square" rtlCol="0" anchor="ctr"/>
+          <a:lstStyle/>
+          <a:p>
+            <a:pPr marL="0" indent="0">
+              <a:buNone/>
+            </a:pPr>
+            <a:r>
+              <a:rPr lang="en-US" sz="1700" b="1" dirty="0">
+                <a:solidFill>
+                  <a:srgbClr val="E8ECF7"/>
+                </a:solidFill>
+                <a:latin typeface="Calibri" pitchFamily="34" charset="0"/>
+                <a:ea typeface="Calibri" pitchFamily="34" charset="-122"/>
+                <a:cs typeface="Calibri" pitchFamily="34" charset="-120"/>
+              </a:rPr>
+              <a:t>You don't need permission</a:t>
+            </a:r>
+            <a:endParaRPr lang="en-US" sz="1700" dirty="0"/>
+          </a:p>
+        </p:txBody>
+      </p:sp>
+      <p:sp>
+        <p:nvSpPr>
+          <p:cNvPr id="15" name="Text 13"/>
+          <p:cNvSpPr/>
+          <p:nvPr/>
+        </p:nvSpPr>
+        <p:spPr>
+          <a:xfrm>
+            <a:off x="1188720" y="4498848"/>
+            <a:ext cx="10058400" cy="457200"/>
+          </a:xfrm>
+          <a:prstGeom prst="rect">
+            <a:avLst/>
+          </a:prstGeom>
+          <a:noFill/>
+          <a:ln/>
+        </p:spPr>
+        <p:txBody>
+          <a:bodyPr wrap="square" rtlCol="0" anchor="ctr"/>
+          <a:lstStyle/>
+          <a:p>
+            <a:pPr marL="0" indent="0">
+              <a:buNone/>
+            </a:pPr>
+            <a:r>
+              <a:rPr lang="en-US" sz="1350" dirty="0">
+                <a:solidFill>
+                  <a:srgbClr val="A9B2C9"/>
+                </a:solidFill>
+                <a:latin typeface="Calibri" pitchFamily="34" charset="0"/>
+                <a:ea typeface="Calibri" pitchFamily="34" charset="-122"/>
+                <a:cs typeface="Calibri" pitchFamily="34" charset="-120"/>
+              </a:rPr>
+              <a:t>No title, budget or mandate is required to build the first version.</a:t>
+            </a:r>
+            <a:endParaRPr lang="en-US" sz="1350" dirty="0"/>
+          </a:p>
+        </p:txBody>
+      </p:sp>
+      <p:sp>
+        <p:nvSpPr>
+          <p:cNvPr id="16" name="Shape 14"/>
+          <p:cNvSpPr/>
+          <p:nvPr/>
+        </p:nvSpPr>
+        <p:spPr>
+          <a:xfrm>
+            <a:off x="548640" y="5212080"/>
+            <a:ext cx="411480" cy="411480"/>
+          </a:xfrm>
+          <a:prstGeom prst="ellipse">
+            <a:avLst/>
+          </a:prstGeom>
+          <a:solidFill>
+            <a:srgbClr val="4F46E5"/>
+          </a:solidFill>
+          <a:ln>
+            <a:noFill/>
+          </a:ln>
+        </p:spPr>
+        <p:txBody>
+          <a:bodyPr/>
+          <a:lstStyle/>
+          <a:p>
+            <a:endParaRPr lang="en-IN"/>
+          </a:p>
+        </p:txBody>
+      </p:sp>
+      <p:sp>
+        <p:nvSpPr>
+          <p:cNvPr id="17" name="Text 15"/>
+          <p:cNvSpPr/>
+          <p:nvPr/>
+        </p:nvSpPr>
+        <p:spPr>
+          <a:xfrm>
+            <a:off x="548640" y="5212080"/>
+            <a:ext cx="411480" cy="411480"/>
+          </a:xfrm>
+          <a:prstGeom prst="rect">
+            <a:avLst/>
+          </a:prstGeom>
+          <a:noFill/>
+          <a:ln/>
+        </p:spPr>
+        <p:txBody>
+          <a:bodyPr wrap="square" rtlCol="0" anchor="ctr"/>
+          <a:lstStyle/>
+          <a:p>
+            <a:pPr marL="0" indent="0" algn="ctr">
+              <a:buNone/>
+            </a:pPr>
+            <a:r>
+              <a:rPr lang="en-US" sz="1600" b="1" dirty="0">
+                <a:solidFill>
+                  <a:srgbClr val="FFFFFF"/>
+                </a:solidFill>
+                <a:latin typeface="Calibri" pitchFamily="34" charset="0"/>
+                <a:ea typeface="Calibri" pitchFamily="34" charset="-122"/>
+                <a:cs typeface="Calibri" pitchFamily="34" charset="-120"/>
+              </a:rPr>
+              <a:t>→</a:t>
+            </a:r>
+            <a:endParaRPr lang="en-US" sz="1600" dirty="0"/>
+          </a:p>
+        </p:txBody>
+      </p:sp>
+      <p:sp>
+        <p:nvSpPr>
+          <p:cNvPr id="18" name="Text 16"/>
+          <p:cNvSpPr/>
+          <p:nvPr/>
+        </p:nvSpPr>
+        <p:spPr>
+          <a:xfrm>
+            <a:off x="1188720" y="5166360"/>
+            <a:ext cx="10058400" cy="365760"/>
+          </a:xfrm>
+          <a:prstGeom prst="rect">
+            <a:avLst/>
+          </a:prstGeom>
+          <a:noFill/>
+          <a:ln/>
+        </p:spPr>
+        <p:txBody>
+          <a:bodyPr wrap="square" rtlCol="0" anchor="ctr"/>
+          <a:lstStyle/>
+          <a:p>
+            <a:pPr marL="0" indent="0">
+              <a:buNone/>
+            </a:pPr>
+            <a:r>
+              <a:rPr lang="en-US" sz="1700" b="1" dirty="0">
+                <a:solidFill>
+                  <a:srgbClr val="E8ECF7"/>
+                </a:solidFill>
+                <a:latin typeface="Calibri" pitchFamily="34" charset="0"/>
+                <a:ea typeface="Calibri" pitchFamily="34" charset="-122"/>
+                <a:cs typeface="Calibri" pitchFamily="34" charset="-120"/>
+              </a:rPr>
+              <a:t>Plan just enough to move</a:t>
+            </a:r>
+            <a:endParaRPr lang="en-US" sz="1700" dirty="0"/>
+          </a:p>
+        </p:txBody>
+      </p:sp>
+      <p:sp>
+        <p:nvSpPr>
+          <p:cNvPr id="19" name="Text 17"/>
+          <p:cNvSpPr/>
+          <p:nvPr/>
+        </p:nvSpPr>
+        <p:spPr>
+          <a:xfrm>
+            <a:off x="1188720" y="5550408"/>
+            <a:ext cx="10058400" cy="457200"/>
+          </a:xfrm>
+          <a:prstGeom prst="rect">
+            <a:avLst/>
+          </a:prstGeom>
+          <a:noFill/>
+          <a:ln/>
+        </p:spPr>
+        <p:txBody>
+          <a:bodyPr wrap="square" rtlCol="0" anchor="ctr"/>
+          <a:lstStyle/>
+          <a:p>
+            <a:pPr marL="0" indent="0">
+              <a:buNone/>
+            </a:pPr>
+            <a:r>
+              <a:rPr lang="en-US" sz="1350" dirty="0">
+                <a:solidFill>
+                  <a:srgbClr val="A9B2C9"/>
+                </a:solidFill>
+                <a:latin typeface="Calibri" pitchFamily="34" charset="0"/>
+                <a:ea typeface="Calibri" pitchFamily="34" charset="-122"/>
+                <a:cs typeface="Calibri" pitchFamily="34" charset="-120"/>
+              </a:rPr>
+              <a:t>Write one page you can act on this week, then get moving.</a:t>
+            </a:r>
+            <a:endParaRPr lang="en-US" sz="1350" dirty="0"/>
+          </a:p>
+        </p:txBody>
+      </p:sp>
+      <p:sp>
+        <p:nvSpPr>
+          <p:cNvPr id="20" name="Text 18"/>
+          <p:cNvSpPr/>
+          <p:nvPr/>
+        </p:nvSpPr>
+        <p:spPr>
+          <a:xfrm>
+            <a:off x="548640" y="6492240"/>
+            <a:ext cx="7315200" cy="274320"/>
+          </a:xfrm>
+          <a:prstGeom prst="rect">
+            <a:avLst/>
+          </a:prstGeom>
+          <a:noFill/>
+          <a:ln/>
+        </p:spPr>
+        <p:txBody>
+          <a:bodyPr wrap="square" rtlCol="0" anchor="ctr"/>
+          <a:lstStyle/>
+          <a:p>
+            <a:pPr marL="0" indent="0">
+              <a:buNone/>
+            </a:pPr>
+            <a:r>
+              <a:rPr lang="en-US" sz="900" dirty="0">
+                <a:solidFill>
+                  <a:srgbClr val="A9B2C9"/>
+                </a:solidFill>
+                <a:latin typeface="Calibri" pitchFamily="34" charset="0"/>
+                <a:ea typeface="Calibri" pitchFamily="34" charset="-122"/>
+                <a:cs typeface="Calibri" pitchFamily="34" charset="-120"/>
+              </a:rPr>
+              <a:t>Agentic AI &amp; Voice Agents Workshop</a:t>
+            </a:r>
+            <a:endParaRPr lang="en-US" sz="900" dirty="0"/>
+          </a:p>
+        </p:txBody>
+      </p:sp>
+      <p:sp>
+        <p:nvSpPr>
+          <p:cNvPr id="21" name="Text 19"/>
+          <p:cNvSpPr/>
+          <p:nvPr/>
+        </p:nvSpPr>
+        <p:spPr>
+          <a:xfrm>
+            <a:off x="11521440" y="6492240"/>
+            <a:ext cx="365760" cy="274320"/>
+          </a:xfrm>
+          <a:prstGeom prst="rect">
+            <a:avLst/>
+          </a:prstGeom>
+          <a:noFill/>
+          <a:ln/>
+        </p:spPr>
+        <p:txBody>
+          <a:bodyPr wrap="square" rtlCol="0" anchor="ctr"/>
+          <a:lstStyle/>
+          <a:p>
+            <a:pPr marL="0" indent="0" algn="r">
+              <a:buNone/>
+            </a:pPr>
+            <a:r>
+              <a:rPr lang="en-US" sz="900" dirty="0">
+                <a:solidFill>
+                  <a:srgbClr val="A9B2C9"/>
+                </a:solidFill>
+                <a:latin typeface="Calibri" pitchFamily="34" charset="0"/>
+                <a:ea typeface="Calibri" pitchFamily="34" charset="-122"/>
+                <a:cs typeface="Calibri" pitchFamily="34" charset="-120"/>
+              </a:rPr>
+              <a:t>6</a:t>
+            </a:r>
+            <a:endParaRPr lang="en-US" sz="900" dirty="0"/>
+          </a:p>
+        </p:txBody>
+      </p:sp>
+    </p:spTree>
+    <p:extLst>
+      <p:ext uri="{BB962C8B-B14F-4D97-AF65-F5344CB8AC3E}">
+        <p14:creationId xmlns:p14="http://schemas.microsoft.com/office/powerpoint/2010/main" val="3858475104"/>
+      </p:ext>
+    </p:extLst>
+  </p:cSld>
+  <p:clrMapOvr>
+    <a:masterClrMapping/>
+  </p:clrMapOvr>
+</p:sld>
+</file>
+
+<file path=ppt/slides/slide5.xml><?xml version="1.0" encoding="utf-8"?>
+<p:sld xmlns:a="http://schemas.openxmlformats.org/drawingml/2006/main" xmlns:r="http://schemas.openxmlformats.org/officeDocument/2006/relationships" xmlns:p="http://schemas.openxmlformats.org/presentationml/2006/main">
+  <p:cSld name="Slide 5">
+    <p:bg>
+      <p:bgPr>
+        <a:solidFill>
+          <a:srgbClr val="0F1320">
+            <a:alpha val="100000"/>
+          </a:srgbClr>
+        </a:solidFill>
+        <a:effectLst/>
+      </p:bgPr>
+    </p:bg>
+    <p:spTree>
+      <p:nvGrpSpPr>
+        <p:cNvPr id="1" name=""/>
+        <p:cNvGrpSpPr/>
+        <p:nvPr/>
+      </p:nvGrpSpPr>
+      <p:grpSpPr>
+        <a:xfrm>
+          <a:off x="0" y="0"/>
+          <a:ext cx="0" cy="0"/>
+          <a:chOff x="0" y="0"/>
+          <a:chExt cx="0" cy="0"/>
+        </a:xfrm>
+      </p:grpSpPr>
+      <p:sp>
+        <p:nvSpPr>
+          <p:cNvPr id="2" name="Text 0"/>
+          <p:cNvSpPr/>
+          <p:nvPr/>
+        </p:nvSpPr>
+        <p:spPr>
+          <a:xfrm>
+            <a:off x="548640" y="457200"/>
+            <a:ext cx="7315200" cy="365760"/>
+          </a:xfrm>
+          <a:prstGeom prst="rect">
+            <a:avLst/>
+          </a:prstGeom>
+          <a:noFill/>
+          <a:ln/>
+        </p:spPr>
+        <p:txBody>
+          <a:bodyPr wrap="square" rtlCol="0" anchor="ctr"/>
+          <a:lstStyle/>
+          <a:p>
+            <a:pPr marL="0" indent="0">
+              <a:buNone/>
+            </a:pPr>
+            <a:r>
+              <a:rPr lang="en-US" sz="1300" b="1" kern="0" spc="200" dirty="0">
+                <a:solidFill>
+                  <a:srgbClr val="22D3EE"/>
+                </a:solidFill>
+                <a:latin typeface="Calibri" pitchFamily="34" charset="0"/>
+                <a:ea typeface="Calibri" pitchFamily="34" charset="-122"/>
+                <a:cs typeface="Calibri" pitchFamily="34" charset="-120"/>
+              </a:rPr>
+              <a:t>ITERATION &amp; FEEDBACK</a:t>
+            </a:r>
+            <a:endParaRPr lang="en-US" sz="1300" dirty="0"/>
+          </a:p>
+        </p:txBody>
+      </p:sp>
+      <p:sp>
+        <p:nvSpPr>
+          <p:cNvPr id="3" name="Text 1"/>
+          <p:cNvSpPr/>
+          <p:nvPr/>
+        </p:nvSpPr>
+        <p:spPr>
+          <a:xfrm>
+            <a:off x="548640" y="822960"/>
+            <a:ext cx="10789920" cy="914400"/>
+          </a:xfrm>
+          <a:prstGeom prst="rect">
+            <a:avLst/>
+          </a:prstGeom>
+          <a:noFill/>
+          <a:ln/>
+        </p:spPr>
+        <p:txBody>
+          <a:bodyPr wrap="square" rtlCol="0" anchor="ctr"/>
+          <a:lstStyle/>
+          <a:p>
+            <a:pPr marL="0" indent="0">
+              <a:buNone/>
+            </a:pPr>
+            <a:r>
+              <a:rPr lang="en-US" sz="3400" b="1" dirty="0">
+                <a:solidFill>
+                  <a:srgbClr val="E8ECF7"/>
+                </a:solidFill>
+                <a:latin typeface="Cambria" pitchFamily="34" charset="0"/>
+                <a:ea typeface="Cambria" pitchFamily="34" charset="-122"/>
+                <a:cs typeface="Cambria" pitchFamily="34" charset="-120"/>
+              </a:rPr>
+              <a:t>Ship, Listen, Repeat</a:t>
+            </a:r>
+            <a:endParaRPr lang="en-US" sz="3400" dirty="0"/>
+          </a:p>
+        </p:txBody>
+      </p:sp>
+      <p:sp>
+        <p:nvSpPr>
+          <p:cNvPr id="4" name="Shape 2"/>
+          <p:cNvSpPr/>
+          <p:nvPr/>
+        </p:nvSpPr>
+        <p:spPr>
+          <a:xfrm>
+            <a:off x="548640" y="2057400"/>
+            <a:ext cx="411480" cy="411480"/>
+          </a:xfrm>
+          <a:prstGeom prst="ellipse">
+            <a:avLst/>
+          </a:prstGeom>
+          <a:solidFill>
+            <a:srgbClr val="4F46E5"/>
+          </a:solidFill>
+          <a:ln>
+            <a:noFill/>
+          </a:ln>
+        </p:spPr>
+        <p:txBody>
+          <a:bodyPr/>
+          <a:lstStyle/>
+          <a:p>
+            <a:endParaRPr lang="en-IN"/>
+          </a:p>
+        </p:txBody>
+      </p:sp>
+      <p:sp>
+        <p:nvSpPr>
+          <p:cNvPr id="5" name="Text 3"/>
+          <p:cNvSpPr/>
+          <p:nvPr/>
+        </p:nvSpPr>
+        <p:spPr>
+          <a:xfrm>
+            <a:off x="548640" y="2057400"/>
+            <a:ext cx="411480" cy="411480"/>
+          </a:xfrm>
+          <a:prstGeom prst="rect">
+            <a:avLst/>
+          </a:prstGeom>
+          <a:noFill/>
+          <a:ln/>
+        </p:spPr>
+        <p:txBody>
+          <a:bodyPr wrap="square" rtlCol="0" anchor="ctr"/>
+          <a:lstStyle/>
+          <a:p>
+            <a:pPr marL="0" indent="0" algn="ctr">
+              <a:buNone/>
+            </a:pPr>
+            <a:r>
+              <a:rPr lang="en-US" sz="1600" b="1" dirty="0">
+                <a:solidFill>
+                  <a:srgbClr val="FFFFFF"/>
+                </a:solidFill>
+                <a:latin typeface="Calibri" pitchFamily="34" charset="0"/>
+                <a:ea typeface="Calibri" pitchFamily="34" charset="-122"/>
+                <a:cs typeface="Calibri" pitchFamily="34" charset="-120"/>
+              </a:rPr>
+              <a:t>→</a:t>
+            </a:r>
+            <a:endParaRPr lang="en-US" sz="1600" dirty="0"/>
+          </a:p>
+        </p:txBody>
+      </p:sp>
+      <p:sp>
+        <p:nvSpPr>
+          <p:cNvPr id="6" name="Text 4"/>
+          <p:cNvSpPr/>
+          <p:nvPr/>
+        </p:nvSpPr>
+        <p:spPr>
+          <a:xfrm>
+            <a:off x="1188720" y="2011680"/>
+            <a:ext cx="10058400" cy="365760"/>
+          </a:xfrm>
+          <a:prstGeom prst="rect">
+            <a:avLst/>
+          </a:prstGeom>
+          <a:noFill/>
+          <a:ln/>
+        </p:spPr>
+        <p:txBody>
+          <a:bodyPr wrap="square" rtlCol="0" anchor="ctr"/>
+          <a:lstStyle/>
+          <a:p>
+            <a:pPr marL="0" indent="0">
+              <a:buNone/>
+            </a:pPr>
+            <a:r>
+              <a:rPr lang="en-US" sz="1700" b="1" dirty="0">
+                <a:solidFill>
+                  <a:srgbClr val="E8ECF7"/>
+                </a:solidFill>
+                <a:latin typeface="Calibri" pitchFamily="34" charset="0"/>
+                <a:ea typeface="Calibri" pitchFamily="34" charset="-122"/>
+                <a:cs typeface="Calibri" pitchFamily="34" charset="-120"/>
+              </a:rPr>
+              <a:t>Version one will embarrass you</a:t>
+            </a:r>
+            <a:endParaRPr lang="en-US" sz="1700" dirty="0"/>
+          </a:p>
+        </p:txBody>
+      </p:sp>
+      <p:sp>
+        <p:nvSpPr>
+          <p:cNvPr id="7" name="Text 5"/>
+          <p:cNvSpPr/>
+          <p:nvPr/>
+        </p:nvSpPr>
+        <p:spPr>
+          <a:xfrm>
+            <a:off x="1188720" y="2395728"/>
+            <a:ext cx="10058400" cy="457200"/>
+          </a:xfrm>
+          <a:prstGeom prst="rect">
+            <a:avLst/>
+          </a:prstGeom>
+          <a:noFill/>
+          <a:ln/>
+        </p:spPr>
+        <p:txBody>
+          <a:bodyPr wrap="square" rtlCol="0" anchor="ctr"/>
+          <a:lstStyle/>
+          <a:p>
+            <a:pPr marL="0" indent="0">
+              <a:buNone/>
+            </a:pPr>
+            <a:r>
+              <a:rPr lang="en-US" sz="1350" dirty="0">
+                <a:solidFill>
+                  <a:srgbClr val="A9B2C9"/>
+                </a:solidFill>
+                <a:latin typeface="Calibri" pitchFamily="34" charset="0"/>
+                <a:ea typeface="Calibri" pitchFamily="34" charset="-122"/>
+                <a:cs typeface="Calibri" pitchFamily="34" charset="-120"/>
+              </a:rPr>
+              <a:t>Ship it anyway. Every version after this one is informed by reality.</a:t>
+            </a:r>
+            <a:endParaRPr lang="en-US" sz="1350" dirty="0"/>
+          </a:p>
+        </p:txBody>
+      </p:sp>
+      <p:sp>
+        <p:nvSpPr>
+          <p:cNvPr id="8" name="Shape 6"/>
+          <p:cNvSpPr/>
+          <p:nvPr/>
+        </p:nvSpPr>
+        <p:spPr>
+          <a:xfrm>
+            <a:off x="548640" y="3108960"/>
+            <a:ext cx="411480" cy="411480"/>
+          </a:xfrm>
+          <a:prstGeom prst="ellipse">
+            <a:avLst/>
+          </a:prstGeom>
+          <a:solidFill>
+            <a:srgbClr val="4F46E5"/>
+          </a:solidFill>
+          <a:ln>
+            <a:noFill/>
+          </a:ln>
+        </p:spPr>
+        <p:txBody>
+          <a:bodyPr/>
+          <a:lstStyle/>
+          <a:p>
+            <a:endParaRPr lang="en-IN"/>
+          </a:p>
+        </p:txBody>
+      </p:sp>
+      <p:sp>
+        <p:nvSpPr>
+          <p:cNvPr id="9" name="Text 7"/>
+          <p:cNvSpPr/>
+          <p:nvPr/>
+        </p:nvSpPr>
+        <p:spPr>
+          <a:xfrm>
+            <a:off x="548640" y="3108960"/>
+            <a:ext cx="411480" cy="411480"/>
+          </a:xfrm>
+          <a:prstGeom prst="rect">
+            <a:avLst/>
+          </a:prstGeom>
+          <a:noFill/>
+          <a:ln/>
+        </p:spPr>
+        <p:txBody>
+          <a:bodyPr wrap="square" rtlCol="0" anchor="ctr"/>
+          <a:lstStyle/>
+          <a:p>
+            <a:pPr marL="0" indent="0" algn="ctr">
+              <a:buNone/>
+            </a:pPr>
+            <a:r>
+              <a:rPr lang="en-US" sz="1600" b="1" dirty="0">
+                <a:solidFill>
+                  <a:srgbClr val="FFFFFF"/>
+                </a:solidFill>
+                <a:latin typeface="Calibri" pitchFamily="34" charset="0"/>
+                <a:ea typeface="Calibri" pitchFamily="34" charset="-122"/>
+                <a:cs typeface="Calibri" pitchFamily="34" charset="-120"/>
+              </a:rPr>
+              <a:t>→</a:t>
+            </a:r>
+            <a:endParaRPr lang="en-US" sz="1600" dirty="0"/>
+          </a:p>
+        </p:txBody>
+      </p:sp>
+      <p:sp>
+        <p:nvSpPr>
+          <p:cNvPr id="10" name="Text 8"/>
+          <p:cNvSpPr/>
+          <p:nvPr/>
+        </p:nvSpPr>
+        <p:spPr>
+          <a:xfrm>
+            <a:off x="1188720" y="3063240"/>
+            <a:ext cx="10058400" cy="365760"/>
+          </a:xfrm>
+          <a:prstGeom prst="rect">
+            <a:avLst/>
+          </a:prstGeom>
+          <a:noFill/>
+          <a:ln/>
+        </p:spPr>
+        <p:txBody>
+          <a:bodyPr wrap="square" rtlCol="0" anchor="ctr"/>
+          <a:lstStyle/>
+          <a:p>
+            <a:pPr marL="0" indent="0">
+              <a:buNone/>
+            </a:pPr>
+            <a:r>
+              <a:rPr lang="en-US" sz="1700" b="1" dirty="0">
+                <a:solidFill>
+                  <a:srgbClr val="E8ECF7"/>
+                </a:solidFill>
+                <a:latin typeface="Calibri" pitchFamily="34" charset="0"/>
+                <a:ea typeface="Calibri" pitchFamily="34" charset="-122"/>
+                <a:cs typeface="Calibri" pitchFamily="34" charset="-120"/>
+              </a:rPr>
+              <a:t>Find one real user first</a:t>
+            </a:r>
+            <a:endParaRPr lang="en-US" sz="1700" dirty="0"/>
+          </a:p>
+        </p:txBody>
+      </p:sp>
+      <p:sp>
+        <p:nvSpPr>
+          <p:cNvPr id="11" name="Text 9"/>
+          <p:cNvSpPr/>
+          <p:nvPr/>
+        </p:nvSpPr>
+        <p:spPr>
+          <a:xfrm>
+            <a:off x="1188720" y="3447288"/>
+            <a:ext cx="10058400" cy="457200"/>
+          </a:xfrm>
+          <a:prstGeom prst="rect">
+            <a:avLst/>
+          </a:prstGeom>
+          <a:noFill/>
+          <a:ln/>
+        </p:spPr>
+        <p:txBody>
+          <a:bodyPr wrap="square" rtlCol="0" anchor="ctr"/>
+          <a:lstStyle/>
+          <a:p>
+            <a:pPr marL="0" indent="0">
+              <a:buNone/>
+            </a:pPr>
+            <a:r>
+              <a:rPr lang="en-US" sz="1350" dirty="0">
+                <a:solidFill>
+                  <a:srgbClr val="A9B2C9"/>
+                </a:solidFill>
+                <a:latin typeface="Calibri" pitchFamily="34" charset="0"/>
+                <a:ea typeface="Calibri" pitchFamily="34" charset="-122"/>
+                <a:cs typeface="Calibri" pitchFamily="34" charset="-120"/>
+              </a:rPr>
+              <a:t>Someone with the problem in front of them will tell you what to build next.</a:t>
+            </a:r>
+            <a:endParaRPr lang="en-US" sz="1350" dirty="0"/>
+          </a:p>
+        </p:txBody>
+      </p:sp>
+      <p:sp>
+        <p:nvSpPr>
+          <p:cNvPr id="12" name="Shape 10"/>
+          <p:cNvSpPr/>
+          <p:nvPr/>
+        </p:nvSpPr>
+        <p:spPr>
+          <a:xfrm>
+            <a:off x="548640" y="4160520"/>
+            <a:ext cx="411480" cy="411480"/>
+          </a:xfrm>
+          <a:prstGeom prst="ellipse">
+            <a:avLst/>
+          </a:prstGeom>
+          <a:solidFill>
+            <a:srgbClr val="4F46E5"/>
+          </a:solidFill>
+          <a:ln>
+            <a:noFill/>
+          </a:ln>
+        </p:spPr>
+        <p:txBody>
+          <a:bodyPr/>
+          <a:lstStyle/>
+          <a:p>
+            <a:endParaRPr lang="en-IN"/>
+          </a:p>
+        </p:txBody>
+      </p:sp>
+      <p:sp>
+        <p:nvSpPr>
+          <p:cNvPr id="13" name="Text 11"/>
+          <p:cNvSpPr/>
+          <p:nvPr/>
+        </p:nvSpPr>
+        <p:spPr>
+          <a:xfrm>
+            <a:off x="548640" y="4160520"/>
+            <a:ext cx="411480" cy="411480"/>
+          </a:xfrm>
+          <a:prstGeom prst="rect">
+            <a:avLst/>
+          </a:prstGeom>
+          <a:noFill/>
+          <a:ln/>
+        </p:spPr>
+        <p:txBody>
+          <a:bodyPr wrap="square" rtlCol="0" anchor="ctr"/>
+          <a:lstStyle/>
+          <a:p>
+            <a:pPr marL="0" indent="0" algn="ctr">
+              <a:buNone/>
+            </a:pPr>
+            <a:r>
+              <a:rPr lang="en-US" sz="1600" b="1" dirty="0">
+                <a:solidFill>
+                  <a:srgbClr val="FFFFFF"/>
+                </a:solidFill>
+                <a:latin typeface="Calibri" pitchFamily="34" charset="0"/>
+                <a:ea typeface="Calibri" pitchFamily="34" charset="-122"/>
+                <a:cs typeface="Calibri" pitchFamily="34" charset="-120"/>
+              </a:rPr>
+              <a:t>→</a:t>
+            </a:r>
+            <a:endParaRPr lang="en-US" sz="1600" dirty="0"/>
+          </a:p>
+        </p:txBody>
+      </p:sp>
+      <p:sp>
+        <p:nvSpPr>
+          <p:cNvPr id="14" name="Text 12"/>
+          <p:cNvSpPr/>
+          <p:nvPr/>
+        </p:nvSpPr>
+        <p:spPr>
+          <a:xfrm>
+            <a:off x="1188720" y="4114800"/>
+            <a:ext cx="10058400" cy="365760"/>
+          </a:xfrm>
+          <a:prstGeom prst="rect">
+            <a:avLst/>
+          </a:prstGeom>
+          <a:noFill/>
+          <a:ln/>
+        </p:spPr>
+        <p:txBody>
+          <a:bodyPr wrap="square" rtlCol="0" anchor="ctr"/>
+          <a:lstStyle/>
+          <a:p>
+            <a:pPr marL="0" indent="0">
+              <a:buNone/>
+            </a:pPr>
+            <a:r>
+              <a:rPr lang="en-US" sz="1700" b="1" dirty="0">
+                <a:solidFill>
+                  <a:srgbClr val="E8ECF7"/>
+                </a:solidFill>
+                <a:latin typeface="Calibri" pitchFamily="34" charset="0"/>
+                <a:ea typeface="Calibri" pitchFamily="34" charset="-122"/>
+                <a:cs typeface="Calibri" pitchFamily="34" charset="-120"/>
+              </a:rPr>
+              <a:t>Build a feedback loop, not a guess</a:t>
+            </a:r>
+            <a:endParaRPr lang="en-US" sz="1700" dirty="0"/>
+          </a:p>
+        </p:txBody>
+      </p:sp>
+      <p:sp>
+        <p:nvSpPr>
+          <p:cNvPr id="15" name="Text 13"/>
+          <p:cNvSpPr/>
+          <p:nvPr/>
+        </p:nvSpPr>
+        <p:spPr>
+          <a:xfrm>
+            <a:off x="1188720" y="4498848"/>
+            <a:ext cx="10058400" cy="457200"/>
+          </a:xfrm>
+          <a:prstGeom prst="rect">
+            <a:avLst/>
+          </a:prstGeom>
+          <a:noFill/>
+          <a:ln/>
+        </p:spPr>
+        <p:txBody>
+          <a:bodyPr wrap="square" rtlCol="0" anchor="ctr"/>
+          <a:lstStyle/>
+          <a:p>
+            <a:pPr marL="0" indent="0">
+              <a:buNone/>
+            </a:pPr>
+            <a:r>
+              <a:rPr lang="en-US" sz="1350" dirty="0">
+                <a:solidFill>
+                  <a:srgbClr val="A9B2C9"/>
+                </a:solidFill>
+                <a:latin typeface="Calibri" pitchFamily="34" charset="0"/>
+                <a:ea typeface="Calibri" pitchFamily="34" charset="-122"/>
+                <a:cs typeface="Calibri" pitchFamily="34" charset="-120"/>
+              </a:rPr>
+              <a:t>Instrument the product so usage answers your questions for you.</a:t>
+            </a:r>
+            <a:endParaRPr lang="en-US" sz="1350" dirty="0"/>
+          </a:p>
+        </p:txBody>
+      </p:sp>
+      <p:sp>
+        <p:nvSpPr>
+          <p:cNvPr id="16" name="Shape 14"/>
+          <p:cNvSpPr/>
+          <p:nvPr/>
+        </p:nvSpPr>
+        <p:spPr>
+          <a:xfrm>
+            <a:off x="548640" y="5212080"/>
+            <a:ext cx="411480" cy="411480"/>
+          </a:xfrm>
+          <a:prstGeom prst="ellipse">
+            <a:avLst/>
+          </a:prstGeom>
+          <a:solidFill>
+            <a:srgbClr val="4F46E5"/>
+          </a:solidFill>
+          <a:ln>
+            <a:noFill/>
+          </a:ln>
+        </p:spPr>
+        <p:txBody>
+          <a:bodyPr/>
+          <a:lstStyle/>
+          <a:p>
+            <a:endParaRPr lang="en-IN"/>
+          </a:p>
+        </p:txBody>
+      </p:sp>
+      <p:sp>
+        <p:nvSpPr>
+          <p:cNvPr id="17" name="Text 15"/>
+          <p:cNvSpPr/>
+          <p:nvPr/>
+        </p:nvSpPr>
+        <p:spPr>
+          <a:xfrm>
+            <a:off x="548640" y="5212080"/>
+            <a:ext cx="411480" cy="411480"/>
+          </a:xfrm>
+          <a:prstGeom prst="rect">
+            <a:avLst/>
+          </a:prstGeom>
+          <a:noFill/>
+          <a:ln/>
+        </p:spPr>
+        <p:txBody>
+          <a:bodyPr wrap="square" rtlCol="0" anchor="ctr"/>
+          <a:lstStyle/>
+          <a:p>
+            <a:pPr marL="0" indent="0" algn="ctr">
+              <a:buNone/>
+            </a:pPr>
+            <a:r>
+              <a:rPr lang="en-US" sz="1600" b="1" dirty="0">
+                <a:solidFill>
+                  <a:srgbClr val="FFFFFF"/>
+                </a:solidFill>
+                <a:latin typeface="Calibri" pitchFamily="34" charset="0"/>
+                <a:ea typeface="Calibri" pitchFamily="34" charset="-122"/>
+                <a:cs typeface="Calibri" pitchFamily="34" charset="-120"/>
+              </a:rPr>
+              <a:t>→</a:t>
+            </a:r>
+            <a:endParaRPr lang="en-US" sz="1600" dirty="0"/>
+          </a:p>
+        </p:txBody>
+      </p:sp>
+      <p:sp>
+        <p:nvSpPr>
+          <p:cNvPr id="18" name="Text 16"/>
+          <p:cNvSpPr/>
+          <p:nvPr/>
+        </p:nvSpPr>
+        <p:spPr>
+          <a:xfrm>
+            <a:off x="1188720" y="5166360"/>
+            <a:ext cx="10058400" cy="365760"/>
+          </a:xfrm>
+          <a:prstGeom prst="rect">
+            <a:avLst/>
+          </a:prstGeom>
+          <a:noFill/>
+          <a:ln/>
+        </p:spPr>
+        <p:txBody>
+          <a:bodyPr wrap="square" rtlCol="0" anchor="ctr"/>
+          <a:lstStyle/>
+          <a:p>
+            <a:pPr marL="0" indent="0">
+              <a:buNone/>
+            </a:pPr>
+            <a:r>
+              <a:rPr lang="en-US" sz="1700" b="1" dirty="0">
+                <a:solidFill>
+                  <a:srgbClr val="E8ECF7"/>
+                </a:solidFill>
+                <a:latin typeface="Calibri" pitchFamily="34" charset="0"/>
+                <a:ea typeface="Calibri" pitchFamily="34" charset="-122"/>
+                <a:cs typeface="Calibri" pitchFamily="34" charset="-120"/>
+              </a:rPr>
+              <a:t>Research before you assume</a:t>
+            </a:r>
+            <a:endParaRPr lang="en-US" sz="1700" dirty="0"/>
+          </a:p>
+        </p:txBody>
+      </p:sp>
+      <p:sp>
+        <p:nvSpPr>
+          <p:cNvPr id="19" name="Text 17"/>
+          <p:cNvSpPr/>
+          <p:nvPr/>
+        </p:nvSpPr>
+        <p:spPr>
+          <a:xfrm>
+            <a:off x="1188720" y="5550408"/>
+            <a:ext cx="10058400" cy="457200"/>
+          </a:xfrm>
+          <a:prstGeom prst="rect">
+            <a:avLst/>
+          </a:prstGeom>
+          <a:noFill/>
+          <a:ln/>
+        </p:spPr>
+        <p:txBody>
+          <a:bodyPr wrap="square" rtlCol="0" anchor="ctr"/>
+          <a:lstStyle/>
+          <a:p>
+            <a:pPr marL="0" indent="0">
+              <a:buNone/>
+            </a:pPr>
+            <a:r>
+              <a:rPr lang="en-US" sz="1350" dirty="0">
+                <a:solidFill>
+                  <a:srgbClr val="A9B2C9"/>
+                </a:solidFill>
+                <a:latin typeface="Calibri" pitchFamily="34" charset="0"/>
+                <a:ea typeface="Calibri" pitchFamily="34" charset="-122"/>
+                <a:cs typeface="Calibri" pitchFamily="34" charset="-120"/>
+              </a:rPr>
+              <a:t>Spend ten minutes checking whether the problem has already been solved.</a:t>
+            </a:r>
+            <a:endParaRPr lang="en-US" sz="1350" dirty="0"/>
+          </a:p>
+        </p:txBody>
+      </p:sp>
+      <p:sp>
+        <p:nvSpPr>
+          <p:cNvPr id="20" name="Text 18"/>
+          <p:cNvSpPr/>
+          <p:nvPr/>
+        </p:nvSpPr>
+        <p:spPr>
+          <a:xfrm>
+            <a:off x="548640" y="6492240"/>
+            <a:ext cx="7315200" cy="274320"/>
+          </a:xfrm>
+          <a:prstGeom prst="rect">
+            <a:avLst/>
+          </a:prstGeom>
+          <a:noFill/>
+          <a:ln/>
+        </p:spPr>
+        <p:txBody>
+          <a:bodyPr wrap="square" rtlCol="0" anchor="ctr"/>
+          <a:lstStyle/>
+          <a:p>
+            <a:pPr marL="0" indent="0">
+              <a:buNone/>
+            </a:pPr>
+            <a:r>
+              <a:rPr lang="en-US" sz="900" dirty="0">
+                <a:solidFill>
+                  <a:srgbClr val="A9B2C9"/>
+                </a:solidFill>
+                <a:latin typeface="Calibri" pitchFamily="34" charset="0"/>
+                <a:ea typeface="Calibri" pitchFamily="34" charset="-122"/>
+                <a:cs typeface="Calibri" pitchFamily="34" charset="-120"/>
+              </a:rPr>
+              <a:t>Agentic AI &amp; Voice Agents Workshop</a:t>
+            </a:r>
+            <a:endParaRPr lang="en-US" sz="900" dirty="0"/>
+          </a:p>
+        </p:txBody>
+      </p:sp>
+      <p:sp>
+        <p:nvSpPr>
+          <p:cNvPr id="21" name="Text 19"/>
+          <p:cNvSpPr/>
+          <p:nvPr/>
+        </p:nvSpPr>
+        <p:spPr>
+          <a:xfrm>
+            <a:off x="11521440" y="6492240"/>
+            <a:ext cx="365760" cy="274320"/>
+          </a:xfrm>
+          <a:prstGeom prst="rect">
+            <a:avLst/>
+          </a:prstGeom>
+          <a:noFill/>
+          <a:ln/>
+        </p:spPr>
+        <p:txBody>
+          <a:bodyPr wrap="square" rtlCol="0" anchor="ctr"/>
+          <a:lstStyle/>
+          <a:p>
+            <a:pPr marL="0" indent="0" algn="r">
+              <a:buNone/>
+            </a:pPr>
+            <a:r>
+              <a:rPr lang="en-US" sz="900" dirty="0">
+                <a:solidFill>
+                  <a:srgbClr val="A9B2C9"/>
+                </a:solidFill>
+                <a:latin typeface="Calibri" pitchFamily="34" charset="0"/>
+                <a:ea typeface="Calibri" pitchFamily="34" charset="-122"/>
+                <a:cs typeface="Calibri" pitchFamily="34" charset="-120"/>
+              </a:rPr>
+              <a:t>7</a:t>
+            </a:r>
+            <a:endParaRPr lang="en-US" sz="900" dirty="0"/>
+          </a:p>
+        </p:txBody>
+      </p:sp>
+    </p:spTree>
+    <p:extLst>
+      <p:ext uri="{BB962C8B-B14F-4D97-AF65-F5344CB8AC3E}">
+        <p14:creationId xmlns:p14="http://schemas.microsoft.com/office/powerpoint/2010/main" val="3799851049"/>
+      </p:ext>
+    </p:extLst>
+  </p:cSld>
+  <p:clrMapOvr>
+    <a:masterClrMapping/>
+  </p:clrMapOvr>
+</p:sld>
+</file>
+
+<file path=ppt/slides/slide6.xml><?xml version="1.0" encoding="utf-8"?>
+<p:sld xmlns:a="http://schemas.openxmlformats.org/drawingml/2006/main" xmlns:r="http://schemas.openxmlformats.org/officeDocument/2006/relationships" xmlns:p="http://schemas.openxmlformats.org/presentationml/2006/main">
+  <p:cSld name="Slide 5">
+    <p:bg>
+      <p:bgPr>
+        <a:solidFill>
+          <a:srgbClr val="0F1320">
+            <a:alpha val="100000"/>
+          </a:srgbClr>
+        </a:solidFill>
+        <a:effectLst/>
+      </p:bgPr>
+    </p:bg>
+    <p:spTree>
+      <p:nvGrpSpPr>
+        <p:cNvPr id="1" name=""/>
+        <p:cNvGrpSpPr/>
+        <p:nvPr/>
+      </p:nvGrpSpPr>
+      <p:grpSpPr>
+        <a:xfrm>
+          <a:off x="0" y="0"/>
+          <a:ext cx="0" cy="0"/>
+          <a:chOff x="0" y="0"/>
+          <a:chExt cx="0" cy="0"/>
+        </a:xfrm>
+      </p:grpSpPr>
+      <p:sp>
+        <p:nvSpPr>
+          <p:cNvPr id="2" name="Text 0"/>
+          <p:cNvSpPr/>
+          <p:nvPr/>
+        </p:nvSpPr>
+        <p:spPr>
+          <a:xfrm>
+            <a:off x="548640" y="457200"/>
+            <a:ext cx="7315200" cy="365760"/>
+          </a:xfrm>
+          <a:prstGeom prst="rect">
+            <a:avLst/>
+          </a:prstGeom>
+          <a:noFill/>
+          <a:ln/>
+        </p:spPr>
+        <p:txBody>
+          <a:bodyPr wrap="square" rtlCol="0" anchor="ctr"/>
+          <a:lstStyle/>
+          <a:p>
+            <a:pPr marL="0" indent="0">
+              <a:buNone/>
+            </a:pPr>
+            <a:r>
+              <a:rPr lang="en-US" sz="1300" b="1" kern="0" spc="200" dirty="0">
+                <a:solidFill>
+                  <a:srgbClr val="22D3EE"/>
+                </a:solidFill>
+                <a:latin typeface="Calibri" pitchFamily="34" charset="0"/>
+                <a:ea typeface="Calibri" pitchFamily="34" charset="-122"/>
+                <a:cs typeface="Calibri" pitchFamily="34" charset="-120"/>
+              </a:rPr>
+              <a:t>TECH STACK &amp; TEAM</a:t>
+            </a:r>
+            <a:endParaRPr lang="en-US" sz="1300" dirty="0"/>
+          </a:p>
+        </p:txBody>
+      </p:sp>
+      <p:sp>
+        <p:nvSpPr>
+          <p:cNvPr id="3" name="Text 1"/>
+          <p:cNvSpPr/>
+          <p:nvPr/>
+        </p:nvSpPr>
+        <p:spPr>
+          <a:xfrm>
+            <a:off x="548640" y="822960"/>
+            <a:ext cx="10789920" cy="914400"/>
+          </a:xfrm>
+          <a:prstGeom prst="rect">
+            <a:avLst/>
+          </a:prstGeom>
+          <a:noFill/>
+          <a:ln/>
+        </p:spPr>
+        <p:txBody>
+          <a:bodyPr wrap="square" rtlCol="0" anchor="ctr"/>
+          <a:lstStyle/>
+          <a:p>
+            <a:pPr marL="0" indent="0">
+              <a:buNone/>
+            </a:pPr>
+            <a:r>
+              <a:rPr lang="en-US" sz="3400" b="1" dirty="0">
+                <a:solidFill>
+                  <a:srgbClr val="E8ECF7"/>
+                </a:solidFill>
+                <a:latin typeface="Cambria" pitchFamily="34" charset="0"/>
+                <a:ea typeface="Cambria" pitchFamily="34" charset="-122"/>
+                <a:cs typeface="Cambria" pitchFamily="34" charset="-120"/>
+              </a:rPr>
+              <a:t>Right Tools, Right People</a:t>
+            </a:r>
+            <a:endParaRPr lang="en-US" sz="3400" dirty="0"/>
+          </a:p>
+        </p:txBody>
+      </p:sp>
+      <p:sp>
+        <p:nvSpPr>
+          <p:cNvPr id="4" name="Shape 2"/>
+          <p:cNvSpPr/>
+          <p:nvPr/>
+        </p:nvSpPr>
+        <p:spPr>
+          <a:xfrm>
+            <a:off x="548640" y="2057400"/>
+            <a:ext cx="411480" cy="411480"/>
+          </a:xfrm>
+          <a:prstGeom prst="ellipse">
+            <a:avLst/>
+          </a:prstGeom>
+          <a:solidFill>
+            <a:srgbClr val="4F46E5"/>
+          </a:solidFill>
+          <a:ln>
+            <a:noFill/>
+          </a:ln>
+        </p:spPr>
+        <p:txBody>
+          <a:bodyPr/>
+          <a:lstStyle/>
+          <a:p>
+            <a:endParaRPr lang="en-IN"/>
+          </a:p>
+        </p:txBody>
+      </p:sp>
+      <p:sp>
+        <p:nvSpPr>
+          <p:cNvPr id="5" name="Text 3"/>
+          <p:cNvSpPr/>
+          <p:nvPr/>
+        </p:nvSpPr>
+        <p:spPr>
+          <a:xfrm>
+            <a:off x="548640" y="2057400"/>
+            <a:ext cx="411480" cy="411480"/>
+          </a:xfrm>
+          <a:prstGeom prst="rect">
+            <a:avLst/>
+          </a:prstGeom>
+          <a:noFill/>
+          <a:ln/>
+        </p:spPr>
+        <p:txBody>
+          <a:bodyPr wrap="square" rtlCol="0" anchor="ctr"/>
+          <a:lstStyle/>
+          <a:p>
+            <a:pPr marL="0" indent="0" algn="ctr">
+              <a:buNone/>
+            </a:pPr>
+            <a:r>
+              <a:rPr lang="en-US" sz="1600" b="1" dirty="0">
+                <a:solidFill>
+                  <a:srgbClr val="FFFFFF"/>
+                </a:solidFill>
+                <a:latin typeface="Calibri" pitchFamily="34" charset="0"/>
+                <a:ea typeface="Calibri" pitchFamily="34" charset="-122"/>
+                <a:cs typeface="Calibri" pitchFamily="34" charset="-120"/>
+              </a:rPr>
+              <a:t>→</a:t>
+            </a:r>
+            <a:endParaRPr lang="en-US" sz="1600" dirty="0"/>
+          </a:p>
+        </p:txBody>
+      </p:sp>
+      <p:sp>
+        <p:nvSpPr>
+          <p:cNvPr id="6" name="Text 4"/>
+          <p:cNvSpPr/>
+          <p:nvPr/>
+        </p:nvSpPr>
+        <p:spPr>
+          <a:xfrm>
+            <a:off x="1188720" y="2011680"/>
+            <a:ext cx="10058400" cy="365760"/>
+          </a:xfrm>
+          <a:prstGeom prst="rect">
+            <a:avLst/>
+          </a:prstGeom>
+          <a:noFill/>
+          <a:ln/>
+        </p:spPr>
+        <p:txBody>
+          <a:bodyPr wrap="square" rtlCol="0" anchor="ctr"/>
+          <a:lstStyle/>
+          <a:p>
+            <a:pPr marL="0" indent="0">
+              <a:buNone/>
+            </a:pPr>
+            <a:r>
+              <a:rPr lang="en-US" sz="1700" b="1" dirty="0">
+                <a:solidFill>
+                  <a:srgbClr val="E8ECF7"/>
+                </a:solidFill>
+                <a:latin typeface="Calibri" pitchFamily="34" charset="0"/>
+                <a:ea typeface="Calibri" pitchFamily="34" charset="-122"/>
+                <a:cs typeface="Calibri" pitchFamily="34" charset="-120"/>
+              </a:rPr>
+              <a:t>Pick boring, proven tech first</a:t>
+            </a:r>
+            <a:endParaRPr lang="en-US" sz="1700" dirty="0"/>
+          </a:p>
+        </p:txBody>
+      </p:sp>
+      <p:sp>
+        <p:nvSpPr>
+          <p:cNvPr id="7" name="Text 5"/>
+          <p:cNvSpPr/>
+          <p:nvPr/>
+        </p:nvSpPr>
+        <p:spPr>
+          <a:xfrm>
+            <a:off x="1188720" y="2395728"/>
+            <a:ext cx="10058400" cy="457200"/>
+          </a:xfrm>
+          <a:prstGeom prst="rect">
+            <a:avLst/>
+          </a:prstGeom>
+          <a:noFill/>
+          <a:ln/>
+        </p:spPr>
+        <p:txBody>
+          <a:bodyPr wrap="square" rtlCol="0" anchor="ctr"/>
+          <a:lstStyle/>
+          <a:p>
+            <a:pPr marL="0" indent="0">
+              <a:buNone/>
+            </a:pPr>
+            <a:r>
+              <a:rPr lang="en-US" sz="1350" dirty="0">
+                <a:solidFill>
+                  <a:srgbClr val="A9B2C9"/>
+                </a:solidFill>
+                <a:latin typeface="Calibri" pitchFamily="34" charset="0"/>
+                <a:ea typeface="Calibri" pitchFamily="34" charset="-122"/>
+                <a:cs typeface="Calibri" pitchFamily="34" charset="-120"/>
+              </a:rPr>
+              <a:t>Mature tools come with documentation, communities and very few surprises.</a:t>
+            </a:r>
+            <a:endParaRPr lang="en-US" sz="1350" dirty="0"/>
+          </a:p>
+        </p:txBody>
+      </p:sp>
+      <p:sp>
+        <p:nvSpPr>
+          <p:cNvPr id="8" name="Shape 6"/>
+          <p:cNvSpPr/>
+          <p:nvPr/>
+        </p:nvSpPr>
+        <p:spPr>
+          <a:xfrm>
+            <a:off x="548640" y="3108960"/>
+            <a:ext cx="411480" cy="411480"/>
+          </a:xfrm>
+          <a:prstGeom prst="ellipse">
+            <a:avLst/>
+          </a:prstGeom>
+          <a:solidFill>
+            <a:srgbClr val="4F46E5"/>
+          </a:solidFill>
+          <a:ln>
+            <a:noFill/>
+          </a:ln>
+        </p:spPr>
+        <p:txBody>
+          <a:bodyPr/>
+          <a:lstStyle/>
+          <a:p>
+            <a:endParaRPr lang="en-IN"/>
+          </a:p>
+        </p:txBody>
+      </p:sp>
+      <p:sp>
+        <p:nvSpPr>
+          <p:cNvPr id="9" name="Text 7"/>
+          <p:cNvSpPr/>
+          <p:nvPr/>
+        </p:nvSpPr>
+        <p:spPr>
+          <a:xfrm>
+            <a:off x="548640" y="3108960"/>
+            <a:ext cx="411480" cy="411480"/>
+          </a:xfrm>
+          <a:prstGeom prst="rect">
+            <a:avLst/>
+          </a:prstGeom>
+          <a:noFill/>
+          <a:ln/>
+        </p:spPr>
+        <p:txBody>
+          <a:bodyPr wrap="square" rtlCol="0" anchor="ctr"/>
+          <a:lstStyle/>
+          <a:p>
+            <a:pPr marL="0" indent="0" algn="ctr">
+              <a:buNone/>
+            </a:pPr>
+            <a:r>
+              <a:rPr lang="en-US" sz="1600" b="1" dirty="0">
+                <a:solidFill>
+                  <a:srgbClr val="FFFFFF"/>
+                </a:solidFill>
+                <a:latin typeface="Calibri" pitchFamily="34" charset="0"/>
+                <a:ea typeface="Calibri" pitchFamily="34" charset="-122"/>
+                <a:cs typeface="Calibri" pitchFamily="34" charset="-120"/>
+              </a:rPr>
+              <a:t>→</a:t>
+            </a:r>
+            <a:endParaRPr lang="en-US" sz="1600" dirty="0"/>
+          </a:p>
+        </p:txBody>
+      </p:sp>
+      <p:sp>
+        <p:nvSpPr>
+          <p:cNvPr id="10" name="Text 8"/>
+          <p:cNvSpPr/>
+          <p:nvPr/>
+        </p:nvSpPr>
+        <p:spPr>
+          <a:xfrm>
+            <a:off x="1188720" y="3063240"/>
+            <a:ext cx="10058400" cy="365760"/>
+          </a:xfrm>
+          <a:prstGeom prst="rect">
+            <a:avLst/>
+          </a:prstGeom>
+          <a:noFill/>
+          <a:ln/>
+        </p:spPr>
+        <p:txBody>
+          <a:bodyPr wrap="square" rtlCol="0" anchor="ctr"/>
+          <a:lstStyle/>
+          <a:p>
+            <a:pPr marL="0" indent="0">
+              <a:buNone/>
+            </a:pPr>
+            <a:r>
+              <a:rPr lang="en-US" sz="1700" b="1" dirty="0">
+                <a:solidFill>
+                  <a:srgbClr val="E8ECF7"/>
+                </a:solidFill>
+                <a:latin typeface="Calibri" pitchFamily="34" charset="0"/>
+                <a:ea typeface="Calibri" pitchFamily="34" charset="-122"/>
+                <a:cs typeface="Calibri" pitchFamily="34" charset="-120"/>
+              </a:rPr>
+              <a:t>Add complexity only when it earns its place</a:t>
+            </a:r>
+            <a:endParaRPr lang="en-US" sz="1700" dirty="0"/>
+          </a:p>
+        </p:txBody>
+      </p:sp>
+      <p:sp>
+        <p:nvSpPr>
+          <p:cNvPr id="11" name="Text 9"/>
+          <p:cNvSpPr/>
+          <p:nvPr/>
+        </p:nvSpPr>
+        <p:spPr>
+          <a:xfrm>
+            <a:off x="1188720" y="3447288"/>
+            <a:ext cx="10058400" cy="457200"/>
+          </a:xfrm>
+          <a:prstGeom prst="rect">
+            <a:avLst/>
+          </a:prstGeom>
+          <a:noFill/>
+          <a:ln/>
+        </p:spPr>
+        <p:txBody>
+          <a:bodyPr wrap="square" rtlCol="0" anchor="ctr"/>
+          <a:lstStyle/>
+          <a:p>
+            <a:pPr marL="0" indent="0">
+              <a:buNone/>
+            </a:pPr>
+            <a:r>
+              <a:rPr lang="en-US" sz="1350" dirty="0">
+                <a:solidFill>
+                  <a:srgbClr val="A9B2C9"/>
+                </a:solidFill>
+                <a:latin typeface="Calibri" pitchFamily="34" charset="0"/>
+                <a:ea typeface="Calibri" pitchFamily="34" charset="-122"/>
+                <a:cs typeface="Calibri" pitchFamily="34" charset="-120"/>
+              </a:rPr>
+              <a:t>Ask what each new layer buys you before you agree to maintain it.</a:t>
+            </a:r>
+            <a:endParaRPr lang="en-US" sz="1350" dirty="0"/>
+          </a:p>
+        </p:txBody>
+      </p:sp>
+      <p:sp>
+        <p:nvSpPr>
+          <p:cNvPr id="12" name="Shape 10"/>
+          <p:cNvSpPr/>
+          <p:nvPr/>
+        </p:nvSpPr>
+        <p:spPr>
+          <a:xfrm>
+            <a:off x="548640" y="4160520"/>
+            <a:ext cx="411480" cy="411480"/>
+          </a:xfrm>
+          <a:prstGeom prst="ellipse">
+            <a:avLst/>
+          </a:prstGeom>
+          <a:solidFill>
+            <a:srgbClr val="4F46E5"/>
+          </a:solidFill>
+          <a:ln>
+            <a:noFill/>
+          </a:ln>
+        </p:spPr>
+        <p:txBody>
+          <a:bodyPr/>
+          <a:lstStyle/>
+          <a:p>
+            <a:endParaRPr lang="en-IN"/>
+          </a:p>
+        </p:txBody>
+      </p:sp>
+      <p:sp>
+        <p:nvSpPr>
+          <p:cNvPr id="13" name="Text 11"/>
+          <p:cNvSpPr/>
+          <p:nvPr/>
+        </p:nvSpPr>
+        <p:spPr>
+          <a:xfrm>
+            <a:off x="548640" y="4160520"/>
+            <a:ext cx="411480" cy="411480"/>
+          </a:xfrm>
+          <a:prstGeom prst="rect">
+            <a:avLst/>
+          </a:prstGeom>
+          <a:noFill/>
+          <a:ln/>
+        </p:spPr>
+        <p:txBody>
+          <a:bodyPr wrap="square" rtlCol="0" anchor="ctr"/>
+          <a:lstStyle/>
+          <a:p>
+            <a:pPr marL="0" indent="0" algn="ctr">
+              <a:buNone/>
+            </a:pPr>
+            <a:r>
+              <a:rPr lang="en-US" sz="1600" b="1" dirty="0">
+                <a:solidFill>
+                  <a:srgbClr val="FFFFFF"/>
+                </a:solidFill>
+                <a:latin typeface="Calibri" pitchFamily="34" charset="0"/>
+                <a:ea typeface="Calibri" pitchFamily="34" charset="-122"/>
+                <a:cs typeface="Calibri" pitchFamily="34" charset="-120"/>
+              </a:rPr>
+              <a:t>→</a:t>
+            </a:r>
+            <a:endParaRPr lang="en-US" sz="1600" dirty="0"/>
+          </a:p>
+        </p:txBody>
+      </p:sp>
+      <p:sp>
+        <p:nvSpPr>
+          <p:cNvPr id="14" name="Text 12"/>
+          <p:cNvSpPr/>
+          <p:nvPr/>
+        </p:nvSpPr>
+        <p:spPr>
+          <a:xfrm>
+            <a:off x="1188720" y="4114800"/>
+            <a:ext cx="10058400" cy="365760"/>
+          </a:xfrm>
+          <a:prstGeom prst="rect">
+            <a:avLst/>
+          </a:prstGeom>
+          <a:noFill/>
+          <a:ln/>
+        </p:spPr>
+        <p:txBody>
+          <a:bodyPr wrap="square" rtlCol="0" anchor="ctr"/>
+          <a:lstStyle/>
+          <a:p>
+            <a:pPr marL="0" indent="0">
+              <a:buNone/>
+            </a:pPr>
+            <a:r>
+              <a:rPr lang="en-US" sz="1700" b="1" dirty="0">
+                <a:solidFill>
+                  <a:srgbClr val="E8ECF7"/>
+                </a:solidFill>
+                <a:latin typeface="Calibri" pitchFamily="34" charset="0"/>
+                <a:ea typeface="Calibri" pitchFamily="34" charset="-122"/>
+                <a:cs typeface="Calibri" pitchFamily="34" charset="-120"/>
+              </a:rPr>
+              <a:t>Hire for your gaps, not your mirror</a:t>
+            </a:r>
+            <a:endParaRPr lang="en-US" sz="1700" dirty="0"/>
+          </a:p>
+        </p:txBody>
+      </p:sp>
+      <p:sp>
+        <p:nvSpPr>
+          <p:cNvPr id="15" name="Text 13"/>
+          <p:cNvSpPr/>
+          <p:nvPr/>
+        </p:nvSpPr>
+        <p:spPr>
+          <a:xfrm>
+            <a:off x="1188720" y="4498848"/>
+            <a:ext cx="10058400" cy="457200"/>
+          </a:xfrm>
+          <a:prstGeom prst="rect">
+            <a:avLst/>
+          </a:prstGeom>
+          <a:noFill/>
+          <a:ln/>
+        </p:spPr>
+        <p:txBody>
+          <a:bodyPr wrap="square" rtlCol="0" anchor="ctr"/>
+          <a:lstStyle/>
+          <a:p>
+            <a:pPr marL="0" indent="0">
+              <a:buNone/>
+            </a:pPr>
+            <a:r>
+              <a:rPr lang="en-US" sz="1350" dirty="0">
+                <a:solidFill>
+                  <a:srgbClr val="A9B2C9"/>
+                </a:solidFill>
+                <a:latin typeface="Calibri" pitchFamily="34" charset="0"/>
+                <a:ea typeface="Calibri" pitchFamily="34" charset="-122"/>
+                <a:cs typeface="Calibri" pitchFamily="34" charset="-120"/>
+              </a:rPr>
+              <a:t>Look for the skills you lack, not for people who think exactly as you do.</a:t>
+            </a:r>
+            <a:endParaRPr lang="en-US" sz="1350" dirty="0"/>
+          </a:p>
+        </p:txBody>
+      </p:sp>
+      <p:sp>
+        <p:nvSpPr>
+          <p:cNvPr id="16" name="Shape 14"/>
+          <p:cNvSpPr/>
+          <p:nvPr/>
+        </p:nvSpPr>
+        <p:spPr>
+          <a:xfrm>
+            <a:off x="548640" y="5212080"/>
+            <a:ext cx="411480" cy="411480"/>
+          </a:xfrm>
+          <a:prstGeom prst="ellipse">
+            <a:avLst/>
+          </a:prstGeom>
+          <a:solidFill>
+            <a:srgbClr val="4F46E5"/>
+          </a:solidFill>
+          <a:ln>
+            <a:noFill/>
+          </a:ln>
+        </p:spPr>
+        <p:txBody>
+          <a:bodyPr/>
+          <a:lstStyle/>
+          <a:p>
+            <a:endParaRPr lang="en-IN"/>
+          </a:p>
+        </p:txBody>
+      </p:sp>
+      <p:sp>
+        <p:nvSpPr>
+          <p:cNvPr id="17" name="Text 15"/>
+          <p:cNvSpPr/>
+          <p:nvPr/>
+        </p:nvSpPr>
+        <p:spPr>
+          <a:xfrm>
+            <a:off x="548640" y="5212080"/>
+            <a:ext cx="411480" cy="411480"/>
+          </a:xfrm>
+          <a:prstGeom prst="rect">
+            <a:avLst/>
+          </a:prstGeom>
+          <a:noFill/>
+          <a:ln/>
+        </p:spPr>
+        <p:txBody>
+          <a:bodyPr wrap="square" rtlCol="0" anchor="ctr"/>
+          <a:lstStyle/>
+          <a:p>
+            <a:pPr marL="0" indent="0" algn="ctr">
+              <a:buNone/>
+            </a:pPr>
+            <a:r>
+              <a:rPr lang="en-US" sz="1600" b="1" dirty="0">
+                <a:solidFill>
+                  <a:srgbClr val="FFFFFF"/>
+                </a:solidFill>
+                <a:latin typeface="Calibri" pitchFamily="34" charset="0"/>
+                <a:ea typeface="Calibri" pitchFamily="34" charset="-122"/>
+                <a:cs typeface="Calibri" pitchFamily="34" charset="-120"/>
+              </a:rPr>
+              <a:t>→</a:t>
+            </a:r>
+            <a:endParaRPr lang="en-US" sz="1600" dirty="0"/>
+          </a:p>
+        </p:txBody>
+      </p:sp>
+      <p:sp>
+        <p:nvSpPr>
+          <p:cNvPr id="18" name="Text 16"/>
+          <p:cNvSpPr/>
+          <p:nvPr/>
+        </p:nvSpPr>
+        <p:spPr>
+          <a:xfrm>
+            <a:off x="1188720" y="5166360"/>
+            <a:ext cx="10058400" cy="365760"/>
+          </a:xfrm>
+          <a:prstGeom prst="rect">
+            <a:avLst/>
+          </a:prstGeom>
+          <a:noFill/>
+          <a:ln/>
+        </p:spPr>
+        <p:txBody>
+          <a:bodyPr wrap="square" rtlCol="0" anchor="ctr"/>
+          <a:lstStyle/>
+          <a:p>
+            <a:pPr marL="0" indent="0">
+              <a:buNone/>
+            </a:pPr>
+            <a:r>
+              <a:rPr lang="en-US" sz="1700" b="1" dirty="0">
+                <a:solidFill>
+                  <a:srgbClr val="E8ECF7"/>
+                </a:solidFill>
+                <a:latin typeface="Calibri" pitchFamily="34" charset="0"/>
+                <a:ea typeface="Calibri" pitchFamily="34" charset="-122"/>
+                <a:cs typeface="Calibri" pitchFamily="34" charset="-120"/>
+              </a:rPr>
+              <a:t>Small team, tight feedback loop</a:t>
+            </a:r>
+            <a:endParaRPr lang="en-US" sz="1700" dirty="0"/>
+          </a:p>
+        </p:txBody>
+      </p:sp>
+      <p:sp>
+        <p:nvSpPr>
+          <p:cNvPr id="19" name="Text 17"/>
+          <p:cNvSpPr/>
+          <p:nvPr/>
+        </p:nvSpPr>
+        <p:spPr>
+          <a:xfrm>
+            <a:off x="1188720" y="5550408"/>
+            <a:ext cx="10058400" cy="457200"/>
+          </a:xfrm>
+          <a:prstGeom prst="rect">
+            <a:avLst/>
+          </a:prstGeom>
+          <a:noFill/>
+          <a:ln/>
+        </p:spPr>
+        <p:txBody>
+          <a:bodyPr wrap="square" rtlCol="0" anchor="ctr"/>
+          <a:lstStyle/>
+          <a:p>
+            <a:pPr marL="0" indent="0">
+              <a:buNone/>
+            </a:pPr>
+            <a:r>
+              <a:rPr lang="en-US" sz="1350" dirty="0">
+                <a:solidFill>
+                  <a:srgbClr val="A9B2C9"/>
+                </a:solidFill>
+                <a:latin typeface="Calibri" pitchFamily="34" charset="0"/>
+                <a:ea typeface="Calibri" pitchFamily="34" charset="-122"/>
+                <a:cs typeface="Calibri" pitchFamily="34" charset="-120"/>
+              </a:rPr>
+              <a:t>Four people in one room can decide in an hour what a committee debates for a month.</a:t>
+            </a:r>
+            <a:endParaRPr lang="en-US" sz="1350" dirty="0"/>
+          </a:p>
+        </p:txBody>
+      </p:sp>
+      <p:sp>
+        <p:nvSpPr>
+          <p:cNvPr id="20" name="Text 18"/>
+          <p:cNvSpPr/>
+          <p:nvPr/>
+        </p:nvSpPr>
+        <p:spPr>
+          <a:xfrm>
+            <a:off x="548640" y="6492240"/>
+            <a:ext cx="7315200" cy="274320"/>
+          </a:xfrm>
+          <a:prstGeom prst="rect">
+            <a:avLst/>
+          </a:prstGeom>
+          <a:noFill/>
+          <a:ln/>
+        </p:spPr>
+        <p:txBody>
+          <a:bodyPr wrap="square" rtlCol="0" anchor="ctr"/>
+          <a:lstStyle/>
+          <a:p>
+            <a:pPr marL="0" indent="0">
+              <a:buNone/>
+            </a:pPr>
+            <a:r>
+              <a:rPr lang="en-US" sz="900" dirty="0">
+                <a:solidFill>
+                  <a:srgbClr val="A9B2C9"/>
+                </a:solidFill>
+                <a:latin typeface="Calibri" pitchFamily="34" charset="0"/>
+                <a:ea typeface="Calibri" pitchFamily="34" charset="-122"/>
+                <a:cs typeface="Calibri" pitchFamily="34" charset="-120"/>
+              </a:rPr>
+              <a:t>Agentic AI &amp; Voice Agents Workshop</a:t>
+            </a:r>
+            <a:endParaRPr lang="en-US" sz="900" dirty="0"/>
+          </a:p>
+        </p:txBody>
+      </p:sp>
+      <p:sp>
+        <p:nvSpPr>
+          <p:cNvPr id="21" name="Text 19"/>
+          <p:cNvSpPr/>
+          <p:nvPr/>
+        </p:nvSpPr>
+        <p:spPr>
+          <a:xfrm>
+            <a:off x="11521440" y="6492240"/>
+            <a:ext cx="365760" cy="274320"/>
+          </a:xfrm>
+          <a:prstGeom prst="rect">
+            <a:avLst/>
+          </a:prstGeom>
+          <a:noFill/>
+          <a:ln/>
+        </p:spPr>
+        <p:txBody>
+          <a:bodyPr wrap="square" rtlCol="0" anchor="ctr"/>
+          <a:lstStyle/>
+          <a:p>
+            <a:pPr marL="0" indent="0" algn="r">
+              <a:buNone/>
+            </a:pPr>
+            <a:r>
+              <a:rPr lang="en-US" sz="900" dirty="0">
+                <a:solidFill>
+                  <a:srgbClr val="A9B2C9"/>
+                </a:solidFill>
+                <a:latin typeface="Calibri" pitchFamily="34" charset="0"/>
+                <a:ea typeface="Calibri" pitchFamily="34" charset="-122"/>
+                <a:cs typeface="Calibri" pitchFamily="34" charset="-120"/>
+              </a:rPr>
+              <a:t>8</a:t>
+            </a:r>
+            <a:endParaRPr lang="en-US" sz="900" dirty="0"/>
+          </a:p>
+        </p:txBody>
+      </p:sp>
+    </p:spTree>
+    <p:extLst>
+      <p:ext uri="{BB962C8B-B14F-4D97-AF65-F5344CB8AC3E}">
+        <p14:creationId xmlns:p14="http://schemas.microsoft.com/office/powerpoint/2010/main" val="1841998772"/>
+      </p:ext>
+    </p:extLst>
+  </p:cSld>
+  <p:clrMapOvr>
+    <a:masterClrMapping/>
+  </p:clrMapOvr>
+</p:sld>
+</file>
+
+<file path=ppt/slides/slide7.xml><?xml version="1.0" encoding="utf-8"?>
 <p:sld xmlns:a="http://schemas.openxmlformats.org/drawingml/2006/main" xmlns:r="http://schemas.openxmlformats.org/officeDocument/2006/relationships" xmlns:p="http://schemas.openxmlformats.org/presentationml/2006/main">
   <p:cSld name="Slide 4">
     <p:bg>
@@ -3956,7 +8051,7 @@
 </p:sld>
 </file>
 
-<file path=ppt/slides/slide5.xml><?xml version="1.0" encoding="utf-8"?>
+<file path=ppt/slides/slide8.xml><?xml version="1.0" encoding="utf-8"?>
 <p:sld xmlns:a="http://schemas.openxmlformats.org/drawingml/2006/main" xmlns:r="http://schemas.openxmlformats.org/officeDocument/2006/relationships" xmlns:p="http://schemas.openxmlformats.org/presentationml/2006/main">
   <p:cSld name="Slide 9">
     <p:bg>
@@ -4666,7 +8761,7 @@
 </p:sld>
 </file>
 
-<file path=ppt/slides/slide6.xml><?xml version="1.0" encoding="utf-8"?>
+<file path=ppt/slides/slide9.xml><?xml version="1.0" encoding="utf-8"?>
 <p:sld xmlns:a="http://schemas.openxmlformats.org/drawingml/2006/main" xmlns:r="http://schemas.openxmlformats.org/officeDocument/2006/relationships" xmlns:p="http://schemas.openxmlformats.org/presentationml/2006/main">
   <p:cSld name="Slide 10">
     <p:bg>
@@ -5259,951 +9354,6 @@
     <p:extLst>
       <p:ext uri="{BB962C8B-B14F-4D97-AF65-F5344CB8AC3E}">
         <p14:creationId xmlns:p14="http://schemas.microsoft.com/office/powerpoint/2010/main" val="2091726185"/>
-      </p:ext>
-    </p:extLst>
-  </p:cSld>
-  <p:clrMapOvr>
-    <a:masterClrMapping/>
-  </p:clrMapOvr>
-</p:sld>
-</file>
-
-<file path=ppt/slides/slide7.xml><?xml version="1.0" encoding="utf-8"?>
-<p:sld xmlns:a="http://schemas.openxmlformats.org/drawingml/2006/main" xmlns:r="http://schemas.openxmlformats.org/officeDocument/2006/relationships" xmlns:p="http://schemas.openxmlformats.org/presentationml/2006/main">
-  <p:cSld name="Slide 11">
-    <p:bg>
-      <p:bgPr>
-        <a:solidFill>
-          <a:srgbClr val="0F1320">
-            <a:alpha val="100000"/>
-          </a:srgbClr>
-        </a:solidFill>
-        <a:effectLst/>
-      </p:bgPr>
-    </p:bg>
-    <p:spTree>
-      <p:nvGrpSpPr>
-        <p:cNvPr id="1" name=""/>
-        <p:cNvGrpSpPr/>
-        <p:nvPr/>
-      </p:nvGrpSpPr>
-      <p:grpSpPr>
-        <a:xfrm>
-          <a:off x="0" y="0"/>
-          <a:ext cx="0" cy="0"/>
-          <a:chOff x="0" y="0"/>
-          <a:chExt cx="0" cy="0"/>
-        </a:xfrm>
-      </p:grpSpPr>
-      <p:sp>
-        <p:nvSpPr>
-          <p:cNvPr id="2" name="Text 0"/>
-          <p:cNvSpPr/>
-          <p:nvPr/>
-        </p:nvSpPr>
-        <p:spPr>
-          <a:xfrm>
-            <a:off x="548640" y="457200"/>
-            <a:ext cx="7315200" cy="365760"/>
-          </a:xfrm>
-          <a:prstGeom prst="rect">
-            <a:avLst/>
-          </a:prstGeom>
-          <a:noFill/>
-          <a:ln/>
-        </p:spPr>
-        <p:txBody>
-          <a:bodyPr wrap="square" rtlCol="0" anchor="ctr"/>
-          <a:lstStyle/>
-          <a:p>
-            <a:pPr marL="0" indent="0">
-              <a:buNone/>
-            </a:pPr>
-            <a:r>
-              <a:rPr lang="en-US" sz="1300" b="1" kern="0" spc="200" dirty="0">
-                <a:solidFill>
-                  <a:srgbClr val="22D3EE"/>
-                </a:solidFill>
-                <a:latin typeface="Calibri" pitchFamily="34" charset="0"/>
-                <a:ea typeface="Calibri" pitchFamily="34" charset="-122"/>
-                <a:cs typeface="Calibri" pitchFamily="34" charset="-120"/>
-              </a:rPr>
-              <a:t>TOOLING</a:t>
-            </a:r>
-            <a:endParaRPr lang="en-US" sz="1300" dirty="0"/>
-          </a:p>
-        </p:txBody>
-      </p:sp>
-      <p:sp>
-        <p:nvSpPr>
-          <p:cNvPr id="3" name="Text 1"/>
-          <p:cNvSpPr/>
-          <p:nvPr/>
-        </p:nvSpPr>
-        <p:spPr>
-          <a:xfrm>
-            <a:off x="548640" y="822960"/>
-            <a:ext cx="10789920" cy="914400"/>
-          </a:xfrm>
-          <a:prstGeom prst="rect">
-            <a:avLst/>
-          </a:prstGeom>
-          <a:noFill/>
-          <a:ln/>
-        </p:spPr>
-        <p:txBody>
-          <a:bodyPr wrap="square" rtlCol="0" anchor="ctr"/>
-          <a:lstStyle/>
-          <a:p>
-            <a:pPr marL="0" indent="0">
-              <a:buNone/>
-            </a:pPr>
-            <a:r>
-              <a:rPr lang="en-US" sz="3400" b="1" dirty="0">
-                <a:solidFill>
-                  <a:srgbClr val="E8ECF7"/>
-                </a:solidFill>
-                <a:latin typeface="Cambria" pitchFamily="34" charset="0"/>
-                <a:ea typeface="Cambria" pitchFamily="34" charset="-122"/>
-                <a:cs typeface="Cambria" pitchFamily="34" charset="-120"/>
-              </a:rPr>
-              <a:t>Why LiveKit</a:t>
-            </a:r>
-            <a:endParaRPr lang="en-US" sz="3400" dirty="0"/>
-          </a:p>
-        </p:txBody>
-      </p:sp>
-      <p:sp>
-        <p:nvSpPr>
-          <p:cNvPr id="4" name="Text 2"/>
-          <p:cNvSpPr/>
-          <p:nvPr/>
-        </p:nvSpPr>
-        <p:spPr>
-          <a:xfrm>
-            <a:off x="548640" y="1965960"/>
-            <a:ext cx="10881360" cy="914400"/>
-          </a:xfrm>
-          <a:prstGeom prst="rect">
-            <a:avLst/>
-          </a:prstGeom>
-          <a:noFill/>
-          <a:ln/>
-        </p:spPr>
-        <p:txBody>
-          <a:bodyPr wrap="square" rtlCol="0" anchor="ctr"/>
-          <a:lstStyle/>
-          <a:p>
-            <a:pPr marL="0" indent="0">
-              <a:buNone/>
-            </a:pPr>
-            <a:r>
-              <a:rPr lang="en-US" sz="1600" dirty="0">
-                <a:solidFill>
-                  <a:srgbClr val="A9B2C9"/>
-                </a:solidFill>
-                <a:latin typeface="Calibri" pitchFamily="34" charset="0"/>
-                <a:ea typeface="Calibri" pitchFamily="34" charset="-122"/>
-                <a:cs typeface="Calibri" pitchFamily="34" charset="-120"/>
-              </a:rPr>
-              <a:t>LiveKit wires the whole pipeline together — the real-time audio connection between you and your agent, plus a framework to plug in any STT, LLM, or TTS provider.</a:t>
-            </a:r>
-            <a:endParaRPr lang="en-US" sz="1600" dirty="0"/>
-          </a:p>
-        </p:txBody>
-      </p:sp>
-      <p:sp>
-        <p:nvSpPr>
-          <p:cNvPr id="5" name="Shape 3"/>
-          <p:cNvSpPr/>
-          <p:nvPr/>
-        </p:nvSpPr>
-        <p:spPr>
-          <a:xfrm>
-            <a:off x="548640" y="3108960"/>
-            <a:ext cx="3520440" cy="2377440"/>
-          </a:xfrm>
-          <a:prstGeom prst="roundRect">
-            <a:avLst>
-              <a:gd name="adj" fmla="val 3846"/>
-            </a:avLst>
-          </a:prstGeom>
-          <a:solidFill>
-            <a:srgbClr val="1A2142"/>
-          </a:solidFill>
-          <a:ln>
-            <a:noFill/>
-          </a:ln>
-        </p:spPr>
-        <p:txBody>
-          <a:bodyPr/>
-          <a:lstStyle/>
-          <a:p>
-            <a:endParaRPr lang="en-IN"/>
-          </a:p>
-        </p:txBody>
-      </p:sp>
-      <p:sp>
-        <p:nvSpPr>
-          <p:cNvPr id="6" name="Text 4"/>
-          <p:cNvSpPr/>
-          <p:nvPr/>
-        </p:nvSpPr>
-        <p:spPr>
-          <a:xfrm>
-            <a:off x="777240" y="3337560"/>
-            <a:ext cx="3063240" cy="548640"/>
-          </a:xfrm>
-          <a:prstGeom prst="rect">
-            <a:avLst/>
-          </a:prstGeom>
-          <a:noFill/>
-          <a:ln/>
-        </p:spPr>
-        <p:txBody>
-          <a:bodyPr wrap="square" rtlCol="0" anchor="ctr"/>
-          <a:lstStyle/>
-          <a:p>
-            <a:pPr marL="0" indent="0">
-              <a:buNone/>
-            </a:pPr>
-            <a:r>
-              <a:rPr lang="en-US" sz="1700" b="1" dirty="0">
-                <a:solidFill>
-                  <a:srgbClr val="22D3EE"/>
-                </a:solidFill>
-                <a:latin typeface="Calibri" pitchFamily="34" charset="0"/>
-                <a:ea typeface="Calibri" pitchFamily="34" charset="-122"/>
-                <a:cs typeface="Calibri" pitchFamily="34" charset="-120"/>
-              </a:rPr>
-              <a:t>Free to start</a:t>
-            </a:r>
-            <a:endParaRPr lang="en-US" sz="1700" dirty="0"/>
-          </a:p>
-        </p:txBody>
-      </p:sp>
-      <p:sp>
-        <p:nvSpPr>
-          <p:cNvPr id="7" name="Text 5"/>
-          <p:cNvSpPr/>
-          <p:nvPr/>
-        </p:nvSpPr>
-        <p:spPr>
-          <a:xfrm>
-            <a:off x="777240" y="3931920"/>
-            <a:ext cx="3063240" cy="1371600"/>
-          </a:xfrm>
-          <a:prstGeom prst="rect">
-            <a:avLst/>
-          </a:prstGeom>
-          <a:noFill/>
-          <a:ln/>
-        </p:spPr>
-        <p:txBody>
-          <a:bodyPr wrap="square" rtlCol="0" anchor="t"/>
-          <a:lstStyle/>
-          <a:p>
-            <a:pPr marL="0" indent="0">
-              <a:buNone/>
-            </a:pPr>
-            <a:r>
-              <a:rPr lang="en-US" sz="1350" dirty="0">
-                <a:solidFill>
-                  <a:srgbClr val="DCE6EF"/>
-                </a:solidFill>
-                <a:latin typeface="Calibri" pitchFamily="34" charset="0"/>
-                <a:ea typeface="Calibri" pitchFamily="34" charset="-122"/>
-                <a:cs typeface="Calibri" pitchFamily="34" charset="-120"/>
-              </a:rPr>
-              <a:t>No credit card needed for the free tier.</a:t>
-            </a:r>
-            <a:endParaRPr lang="en-US" sz="1350" dirty="0"/>
-          </a:p>
-        </p:txBody>
-      </p:sp>
-      <p:sp>
-        <p:nvSpPr>
-          <p:cNvPr id="8" name="Shape 6"/>
-          <p:cNvSpPr/>
-          <p:nvPr/>
-        </p:nvSpPr>
-        <p:spPr>
-          <a:xfrm>
-            <a:off x="4297680" y="3108960"/>
-            <a:ext cx="3520440" cy="2377440"/>
-          </a:xfrm>
-          <a:prstGeom prst="roundRect">
-            <a:avLst>
-              <a:gd name="adj" fmla="val 3846"/>
-            </a:avLst>
-          </a:prstGeom>
-          <a:solidFill>
-            <a:srgbClr val="1A2142"/>
-          </a:solidFill>
-          <a:ln>
-            <a:noFill/>
-          </a:ln>
-        </p:spPr>
-        <p:txBody>
-          <a:bodyPr/>
-          <a:lstStyle/>
-          <a:p>
-            <a:endParaRPr lang="en-IN"/>
-          </a:p>
-        </p:txBody>
-      </p:sp>
-      <p:sp>
-        <p:nvSpPr>
-          <p:cNvPr id="9" name="Text 7"/>
-          <p:cNvSpPr/>
-          <p:nvPr/>
-        </p:nvSpPr>
-        <p:spPr>
-          <a:xfrm>
-            <a:off x="4526280" y="3337560"/>
-            <a:ext cx="3063240" cy="548640"/>
-          </a:xfrm>
-          <a:prstGeom prst="rect">
-            <a:avLst/>
-          </a:prstGeom>
-          <a:noFill/>
-          <a:ln/>
-        </p:spPr>
-        <p:txBody>
-          <a:bodyPr wrap="square" rtlCol="0" anchor="ctr"/>
-          <a:lstStyle/>
-          <a:p>
-            <a:pPr marL="0" indent="0">
-              <a:buNone/>
-            </a:pPr>
-            <a:r>
-              <a:rPr lang="en-US" sz="1700" b="1" dirty="0">
-                <a:solidFill>
-                  <a:srgbClr val="22D3EE"/>
-                </a:solidFill>
-                <a:latin typeface="Calibri" pitchFamily="34" charset="0"/>
-                <a:ea typeface="Calibri" pitchFamily="34" charset="-122"/>
-                <a:cs typeface="Calibri" pitchFamily="34" charset="-120"/>
-              </a:rPr>
-              <a:t>Browser-based testing</a:t>
-            </a:r>
-            <a:endParaRPr lang="en-US" sz="1700" dirty="0"/>
-          </a:p>
-        </p:txBody>
-      </p:sp>
-      <p:sp>
-        <p:nvSpPr>
-          <p:cNvPr id="10" name="Text 8"/>
-          <p:cNvSpPr/>
-          <p:nvPr/>
-        </p:nvSpPr>
-        <p:spPr>
-          <a:xfrm>
-            <a:off x="4526280" y="3931920"/>
-            <a:ext cx="3063240" cy="1371600"/>
-          </a:xfrm>
-          <a:prstGeom prst="rect">
-            <a:avLst/>
-          </a:prstGeom>
-          <a:noFill/>
-          <a:ln/>
-        </p:spPr>
-        <p:txBody>
-          <a:bodyPr wrap="square" rtlCol="0" anchor="t"/>
-          <a:lstStyle/>
-          <a:p>
-            <a:pPr marL="0" indent="0">
-              <a:buNone/>
-            </a:pPr>
-            <a:r>
-              <a:rPr lang="en-US" sz="1350" dirty="0">
-                <a:solidFill>
-                  <a:srgbClr val="DCE6EF"/>
-                </a:solidFill>
-                <a:latin typeface="Calibri" pitchFamily="34" charset="0"/>
-                <a:ea typeface="Calibri" pitchFamily="34" charset="-122"/>
-                <a:cs typeface="Calibri" pitchFamily="34" charset="-120"/>
-              </a:rPr>
-              <a:t>Agents Playground — talk to your agent with just a mic.</a:t>
-            </a:r>
-            <a:endParaRPr lang="en-US" sz="1350" dirty="0"/>
-          </a:p>
-        </p:txBody>
-      </p:sp>
-      <p:sp>
-        <p:nvSpPr>
-          <p:cNvPr id="11" name="Shape 9"/>
-          <p:cNvSpPr/>
-          <p:nvPr/>
-        </p:nvSpPr>
-        <p:spPr>
-          <a:xfrm>
-            <a:off x="8046720" y="3108960"/>
-            <a:ext cx="3520440" cy="2377440"/>
-          </a:xfrm>
-          <a:prstGeom prst="roundRect">
-            <a:avLst>
-              <a:gd name="adj" fmla="val 3846"/>
-            </a:avLst>
-          </a:prstGeom>
-          <a:solidFill>
-            <a:srgbClr val="1A2142"/>
-          </a:solidFill>
-          <a:ln>
-            <a:noFill/>
-          </a:ln>
-        </p:spPr>
-        <p:txBody>
-          <a:bodyPr/>
-          <a:lstStyle/>
-          <a:p>
-            <a:endParaRPr lang="en-IN"/>
-          </a:p>
-        </p:txBody>
-      </p:sp>
-      <p:sp>
-        <p:nvSpPr>
-          <p:cNvPr id="12" name="Text 10"/>
-          <p:cNvSpPr/>
-          <p:nvPr/>
-        </p:nvSpPr>
-        <p:spPr>
-          <a:xfrm>
-            <a:off x="8275320" y="3337560"/>
-            <a:ext cx="3063240" cy="548640"/>
-          </a:xfrm>
-          <a:prstGeom prst="rect">
-            <a:avLst/>
-          </a:prstGeom>
-          <a:noFill/>
-          <a:ln/>
-        </p:spPr>
-        <p:txBody>
-          <a:bodyPr wrap="square" rtlCol="0" anchor="ctr"/>
-          <a:lstStyle/>
-          <a:p>
-            <a:pPr marL="0" indent="0">
-              <a:buNone/>
-            </a:pPr>
-            <a:r>
-              <a:rPr lang="en-US" sz="1700" b="1" dirty="0">
-                <a:solidFill>
-                  <a:srgbClr val="22D3EE"/>
-                </a:solidFill>
-                <a:latin typeface="Calibri" pitchFamily="34" charset="0"/>
-                <a:ea typeface="Calibri" pitchFamily="34" charset="-122"/>
-                <a:cs typeface="Calibri" pitchFamily="34" charset="-120"/>
-              </a:rPr>
-              <a:t>Production-grade</a:t>
-            </a:r>
-            <a:endParaRPr lang="en-US" sz="1700" dirty="0"/>
-          </a:p>
-        </p:txBody>
-      </p:sp>
-      <p:sp>
-        <p:nvSpPr>
-          <p:cNvPr id="13" name="Text 11"/>
-          <p:cNvSpPr/>
-          <p:nvPr/>
-        </p:nvSpPr>
-        <p:spPr>
-          <a:xfrm>
-            <a:off x="8275320" y="3931920"/>
-            <a:ext cx="3063240" cy="1371600"/>
-          </a:xfrm>
-          <a:prstGeom prst="rect">
-            <a:avLst/>
-          </a:prstGeom>
-          <a:noFill/>
-          <a:ln/>
-        </p:spPr>
-        <p:txBody>
-          <a:bodyPr wrap="square" rtlCol="0" anchor="t"/>
-          <a:lstStyle/>
-          <a:p>
-            <a:pPr marL="0" indent="0">
-              <a:buNone/>
-            </a:pPr>
-            <a:r>
-              <a:rPr lang="en-US" sz="1350" dirty="0">
-                <a:solidFill>
-                  <a:srgbClr val="DCE6EF"/>
-                </a:solidFill>
-                <a:latin typeface="Calibri" pitchFamily="34" charset="0"/>
-                <a:ea typeface="Calibri" pitchFamily="34" charset="-122"/>
-                <a:cs typeface="Calibri" pitchFamily="34" charset="-120"/>
-              </a:rPr>
-              <a:t>The same framework powering real deployed voice agents.</a:t>
-            </a:r>
-            <a:endParaRPr lang="en-US" sz="1350" dirty="0"/>
-          </a:p>
-        </p:txBody>
-      </p:sp>
-      <p:sp>
-        <p:nvSpPr>
-          <p:cNvPr id="14" name="Text 12"/>
-          <p:cNvSpPr/>
-          <p:nvPr/>
-        </p:nvSpPr>
-        <p:spPr>
-          <a:xfrm>
-            <a:off x="548640" y="6492240"/>
-            <a:ext cx="7315200" cy="274320"/>
-          </a:xfrm>
-          <a:prstGeom prst="rect">
-            <a:avLst/>
-          </a:prstGeom>
-          <a:noFill/>
-          <a:ln/>
-        </p:spPr>
-        <p:txBody>
-          <a:bodyPr wrap="square" rtlCol="0" anchor="ctr"/>
-          <a:lstStyle/>
-          <a:p>
-            <a:pPr marL="0" indent="0">
-              <a:buNone/>
-            </a:pPr>
-            <a:r>
-              <a:rPr lang="en-US" sz="900" dirty="0">
-                <a:solidFill>
-                  <a:srgbClr val="A9B2C9"/>
-                </a:solidFill>
-                <a:latin typeface="Calibri" pitchFamily="34" charset="0"/>
-                <a:ea typeface="Calibri" pitchFamily="34" charset="-122"/>
-                <a:cs typeface="Calibri" pitchFamily="34" charset="-120"/>
-              </a:rPr>
-              <a:t>Agentic AI &amp; Voice Agents Workshop</a:t>
-            </a:r>
-            <a:endParaRPr lang="en-US" sz="900" dirty="0"/>
-          </a:p>
-        </p:txBody>
-      </p:sp>
-      <p:sp>
-        <p:nvSpPr>
-          <p:cNvPr id="15" name="Text 13"/>
-          <p:cNvSpPr/>
-          <p:nvPr/>
-        </p:nvSpPr>
-        <p:spPr>
-          <a:xfrm>
-            <a:off x="11521440" y="6492240"/>
-            <a:ext cx="365760" cy="274320"/>
-          </a:xfrm>
-          <a:prstGeom prst="rect">
-            <a:avLst/>
-          </a:prstGeom>
-          <a:noFill/>
-          <a:ln/>
-        </p:spPr>
-        <p:txBody>
-          <a:bodyPr wrap="square" rtlCol="0" anchor="ctr"/>
-          <a:lstStyle/>
-          <a:p>
-            <a:pPr marL="0" indent="0" algn="r">
-              <a:buNone/>
-            </a:pPr>
-            <a:r>
-              <a:rPr lang="en-US" sz="900" dirty="0">
-                <a:solidFill>
-                  <a:srgbClr val="A9B2C9"/>
-                </a:solidFill>
-                <a:latin typeface="Calibri" pitchFamily="34" charset="0"/>
-                <a:ea typeface="Calibri" pitchFamily="34" charset="-122"/>
-                <a:cs typeface="Calibri" pitchFamily="34" charset="-120"/>
-              </a:rPr>
-              <a:t>11</a:t>
-            </a:r>
-            <a:endParaRPr lang="en-US" sz="900" dirty="0"/>
-          </a:p>
-        </p:txBody>
-      </p:sp>
-    </p:spTree>
-    <p:extLst>
-      <p:ext uri="{BB962C8B-B14F-4D97-AF65-F5344CB8AC3E}">
-        <p14:creationId xmlns:p14="http://schemas.microsoft.com/office/powerpoint/2010/main" val="2627132905"/>
-      </p:ext>
-    </p:extLst>
-  </p:cSld>
-  <p:clrMapOvr>
-    <a:masterClrMapping/>
-  </p:clrMapOvr>
-</p:sld>
-</file>
-
-<file path=ppt/slides/slide8.xml><?xml version="1.0" encoding="utf-8"?>
-<p:sld xmlns:a="http://schemas.openxmlformats.org/drawingml/2006/main" xmlns:r="http://schemas.openxmlformats.org/officeDocument/2006/relationships" xmlns:p="http://schemas.openxmlformats.org/presentationml/2006/main">
-  <p:cSld name="Slide 12">
-    <p:bg>
-      <p:bgPr>
-        <a:solidFill>
-          <a:srgbClr val="0F1320">
-            <a:alpha val="100000"/>
-          </a:srgbClr>
-        </a:solidFill>
-        <a:effectLst/>
-      </p:bgPr>
-    </p:bg>
-    <p:spTree>
-      <p:nvGrpSpPr>
-        <p:cNvPr id="1" name=""/>
-        <p:cNvGrpSpPr/>
-        <p:nvPr/>
-      </p:nvGrpSpPr>
-      <p:grpSpPr>
-        <a:xfrm>
-          <a:off x="0" y="0"/>
-          <a:ext cx="0" cy="0"/>
-          <a:chOff x="0" y="0"/>
-          <a:chExt cx="0" cy="0"/>
-        </a:xfrm>
-      </p:grpSpPr>
-      <p:sp>
-        <p:nvSpPr>
-          <p:cNvPr id="2" name="Text 0"/>
-          <p:cNvSpPr/>
-          <p:nvPr/>
-        </p:nvSpPr>
-        <p:spPr>
-          <a:xfrm>
-            <a:off x="548640" y="457200"/>
-            <a:ext cx="7315200" cy="365760"/>
-          </a:xfrm>
-          <a:prstGeom prst="rect">
-            <a:avLst/>
-          </a:prstGeom>
-          <a:noFill/>
-          <a:ln/>
-        </p:spPr>
-        <p:txBody>
-          <a:bodyPr wrap="square" rtlCol="0" anchor="ctr"/>
-          <a:lstStyle/>
-          <a:p>
-            <a:pPr marL="0" indent="0">
-              <a:buNone/>
-            </a:pPr>
-            <a:r>
-              <a:rPr lang="en-US" sz="1300" b="1" kern="0" spc="200" dirty="0">
-                <a:solidFill>
-                  <a:srgbClr val="22D3EE"/>
-                </a:solidFill>
-                <a:latin typeface="Calibri" pitchFamily="34" charset="0"/>
-                <a:ea typeface="Calibri" pitchFamily="34" charset="-122"/>
-                <a:cs typeface="Calibri" pitchFamily="34" charset="-120"/>
-              </a:rPr>
-              <a:t>TODAY'S HANDS-ON</a:t>
-            </a:r>
-            <a:endParaRPr lang="en-US" sz="1300" dirty="0"/>
-          </a:p>
-        </p:txBody>
-      </p:sp>
-      <p:sp>
-        <p:nvSpPr>
-          <p:cNvPr id="3" name="Text 1"/>
-          <p:cNvSpPr/>
-          <p:nvPr/>
-        </p:nvSpPr>
-        <p:spPr>
-          <a:xfrm>
-            <a:off x="548640" y="822960"/>
-            <a:ext cx="10789920" cy="914400"/>
-          </a:xfrm>
-          <a:prstGeom prst="rect">
-            <a:avLst/>
-          </a:prstGeom>
-          <a:noFill/>
-          <a:ln/>
-        </p:spPr>
-        <p:txBody>
-          <a:bodyPr wrap="square" rtlCol="0" anchor="ctr"/>
-          <a:lstStyle/>
-          <a:p>
-            <a:pPr marL="0" indent="0">
-              <a:buNone/>
-            </a:pPr>
-            <a:r>
-              <a:rPr lang="en-US" sz="3400" b="1" dirty="0">
-                <a:solidFill>
-                  <a:srgbClr val="E8ECF7"/>
-                </a:solidFill>
-                <a:latin typeface="Cambria" pitchFamily="34" charset="0"/>
-                <a:ea typeface="Cambria" pitchFamily="34" charset="-122"/>
-                <a:cs typeface="Cambria" pitchFamily="34" charset="-120"/>
-              </a:rPr>
-              <a:t>Your Repo for Today</a:t>
-            </a:r>
-            <a:endParaRPr lang="en-US" sz="3400" dirty="0"/>
-          </a:p>
-        </p:txBody>
-      </p:sp>
-      <p:sp>
-        <p:nvSpPr>
-          <p:cNvPr id="25" name="Text 23"/>
-          <p:cNvSpPr/>
-          <p:nvPr/>
-        </p:nvSpPr>
-        <p:spPr>
-          <a:xfrm>
-            <a:off x="548640" y="6492240"/>
-            <a:ext cx="7315200" cy="274320"/>
-          </a:xfrm>
-          <a:prstGeom prst="rect">
-            <a:avLst/>
-          </a:prstGeom>
-          <a:noFill/>
-          <a:ln/>
-        </p:spPr>
-        <p:txBody>
-          <a:bodyPr wrap="square" rtlCol="0" anchor="ctr"/>
-          <a:lstStyle/>
-          <a:p>
-            <a:pPr marL="0" indent="0">
-              <a:buNone/>
-            </a:pPr>
-            <a:r>
-              <a:rPr lang="en-US" sz="900" dirty="0">
-                <a:solidFill>
-                  <a:srgbClr val="A9B2C9"/>
-                </a:solidFill>
-                <a:latin typeface="Calibri" pitchFamily="34" charset="0"/>
-                <a:ea typeface="Calibri" pitchFamily="34" charset="-122"/>
-                <a:cs typeface="Calibri" pitchFamily="34" charset="-120"/>
-              </a:rPr>
-              <a:t>Agentic AI &amp; Voice Agents Workshop</a:t>
-            </a:r>
-            <a:endParaRPr lang="en-US" sz="900" dirty="0"/>
-          </a:p>
-        </p:txBody>
-      </p:sp>
-      <p:sp>
-        <p:nvSpPr>
-          <p:cNvPr id="26" name="Text 24"/>
-          <p:cNvSpPr/>
-          <p:nvPr/>
-        </p:nvSpPr>
-        <p:spPr>
-          <a:xfrm>
-            <a:off x="11521440" y="6492240"/>
-            <a:ext cx="365760" cy="274320"/>
-          </a:xfrm>
-          <a:prstGeom prst="rect">
-            <a:avLst/>
-          </a:prstGeom>
-          <a:noFill/>
-          <a:ln/>
-        </p:spPr>
-        <p:txBody>
-          <a:bodyPr wrap="square" rtlCol="0" anchor="ctr"/>
-          <a:lstStyle/>
-          <a:p>
-            <a:pPr marL="0" indent="0" algn="r">
-              <a:buNone/>
-            </a:pPr>
-            <a:r>
-              <a:rPr lang="en-US" sz="900" dirty="0">
-                <a:solidFill>
-                  <a:srgbClr val="A9B2C9"/>
-                </a:solidFill>
-                <a:latin typeface="Calibri" pitchFamily="34" charset="0"/>
-                <a:ea typeface="Calibri" pitchFamily="34" charset="-122"/>
-                <a:cs typeface="Calibri" pitchFamily="34" charset="-120"/>
-              </a:rPr>
-              <a:t>12</a:t>
-            </a:r>
-            <a:endParaRPr lang="en-US" sz="900" dirty="0"/>
-          </a:p>
-        </p:txBody>
-      </p:sp>
-      <p:pic>
-        <p:nvPicPr>
-          <p:cNvPr id="28" name="Picture 27">
-            <a:extLst>
-              <a:ext uri="{FF2B5EF4-FFF2-40B4-BE49-F238E27FC236}">
-                <a16:creationId xmlns:a16="http://schemas.microsoft.com/office/drawing/2014/main" id="{D54EF76A-2D47-C19B-F4DD-A9C172D0B2A5}"/>
-              </a:ext>
-            </a:extLst>
-          </p:cNvPr>
-          <p:cNvPicPr>
-            <a:picLocks noChangeAspect="1"/>
-          </p:cNvPicPr>
-          <p:nvPr/>
-        </p:nvPicPr>
-        <p:blipFill>
-          <a:blip r:embed="rId3"/>
-          <a:stretch>
-            <a:fillRect/>
-          </a:stretch>
-        </p:blipFill>
-        <p:spPr>
-          <a:xfrm>
-            <a:off x="3771900" y="1950720"/>
-            <a:ext cx="4343400" cy="4343400"/>
-          </a:xfrm>
-          <a:prstGeom prst="rect">
-            <a:avLst/>
-          </a:prstGeom>
-        </p:spPr>
-      </p:pic>
-    </p:spTree>
-    <p:extLst>
-      <p:ext uri="{BB962C8B-B14F-4D97-AF65-F5344CB8AC3E}">
-        <p14:creationId xmlns:p14="http://schemas.microsoft.com/office/powerpoint/2010/main" val="3372542555"/>
-      </p:ext>
-    </p:extLst>
-  </p:cSld>
-  <p:clrMapOvr>
-    <a:masterClrMapping/>
-  </p:clrMapOvr>
-</p:sld>
-</file>
-
-<file path=ppt/slides/slide9.xml><?xml version="1.0" encoding="utf-8"?>
-<p:sld xmlns:a="http://schemas.openxmlformats.org/drawingml/2006/main" xmlns:r="http://schemas.openxmlformats.org/officeDocument/2006/relationships" xmlns:p="http://schemas.openxmlformats.org/presentationml/2006/main">
-  <p:cSld name="Slide 16">
-    <p:bg>
-      <p:bgPr>
-        <a:solidFill>
-          <a:srgbClr val="0B0E1A">
-            <a:alpha val="100000"/>
-          </a:srgbClr>
-        </a:solidFill>
-        <a:effectLst/>
-      </p:bgPr>
-    </p:bg>
-    <p:spTree>
-      <p:nvGrpSpPr>
-        <p:cNvPr id="1" name=""/>
-        <p:cNvGrpSpPr/>
-        <p:nvPr/>
-      </p:nvGrpSpPr>
-      <p:grpSpPr>
-        <a:xfrm>
-          <a:off x="0" y="0"/>
-          <a:ext cx="0" cy="0"/>
-          <a:chOff x="0" y="0"/>
-          <a:chExt cx="0" cy="0"/>
-        </a:xfrm>
-      </p:grpSpPr>
-      <p:sp>
-        <p:nvSpPr>
-          <p:cNvPr id="2" name="Text 0"/>
-          <p:cNvSpPr/>
-          <p:nvPr/>
-        </p:nvSpPr>
-        <p:spPr>
-          <a:xfrm>
-            <a:off x="731520" y="2651760"/>
-            <a:ext cx="10698480" cy="1097280"/>
-          </a:xfrm>
-          <a:prstGeom prst="rect">
-            <a:avLst/>
-          </a:prstGeom>
-          <a:noFill/>
-          <a:ln/>
-        </p:spPr>
-        <p:txBody>
-          <a:bodyPr wrap="square" rtlCol="0" anchor="ctr"/>
-          <a:lstStyle/>
-          <a:p>
-            <a:pPr marL="0" indent="0">
-              <a:buNone/>
-            </a:pPr>
-            <a:r>
-              <a:rPr lang="en-US" sz="4800" b="1" dirty="0">
-                <a:solidFill>
-                  <a:srgbClr val="FFFFFF"/>
-                </a:solidFill>
-                <a:latin typeface="Cambria" pitchFamily="34" charset="0"/>
-                <a:ea typeface="Cambria" pitchFamily="34" charset="-122"/>
-                <a:cs typeface="Cambria" pitchFamily="34" charset="-120"/>
-              </a:rPr>
-              <a:t>Thank You</a:t>
-            </a:r>
-            <a:endParaRPr lang="en-US" sz="4800" dirty="0"/>
-          </a:p>
-        </p:txBody>
-      </p:sp>
-      <p:sp>
-        <p:nvSpPr>
-          <p:cNvPr id="3" name="Text 1"/>
-          <p:cNvSpPr/>
-          <p:nvPr/>
-        </p:nvSpPr>
-        <p:spPr>
-          <a:xfrm>
-            <a:off x="731520" y="3566160"/>
-            <a:ext cx="10698480" cy="457200"/>
-          </a:xfrm>
-          <a:prstGeom prst="rect">
-            <a:avLst/>
-          </a:prstGeom>
-          <a:noFill/>
-          <a:ln/>
-        </p:spPr>
-        <p:txBody>
-          <a:bodyPr wrap="square" rtlCol="0" anchor="ctr"/>
-          <a:lstStyle/>
-          <a:p>
-            <a:pPr marL="0" indent="0">
-              <a:buNone/>
-            </a:pPr>
-            <a:r>
-              <a:rPr lang="en-US" sz="1800" dirty="0">
-                <a:solidFill>
-                  <a:srgbClr val="C3CBE8"/>
-                </a:solidFill>
-                <a:latin typeface="Calibri" pitchFamily="34" charset="0"/>
-                <a:ea typeface="Calibri" pitchFamily="34" charset="-122"/>
-                <a:cs typeface="Calibri" pitchFamily="34" charset="-120"/>
-              </a:rPr>
-              <a:t>Questions? Find me after the session.</a:t>
-            </a:r>
-            <a:endParaRPr lang="en-US" sz="1800" dirty="0"/>
-          </a:p>
-        </p:txBody>
-      </p:sp>
-      <p:sp>
-        <p:nvSpPr>
-          <p:cNvPr id="4" name="Text 2"/>
-          <p:cNvSpPr/>
-          <p:nvPr/>
-        </p:nvSpPr>
-        <p:spPr>
-          <a:xfrm>
-            <a:off x="731520" y="4114800"/>
-            <a:ext cx="10698480" cy="457200"/>
-          </a:xfrm>
-          <a:prstGeom prst="rect">
-            <a:avLst/>
-          </a:prstGeom>
-          <a:noFill/>
-          <a:ln/>
-        </p:spPr>
-        <p:txBody>
-          <a:bodyPr wrap="square" rtlCol="0" anchor="ctr"/>
-          <a:lstStyle/>
-          <a:p>
-            <a:pPr marL="0" indent="0">
-              <a:buNone/>
-            </a:pPr>
-            <a:r>
-              <a:rPr lang="en-US" sz="1400" dirty="0">
-                <a:solidFill>
-                  <a:srgbClr val="22D3EE"/>
-                </a:solidFill>
-                <a:latin typeface="Courier New" pitchFamily="34" charset="0"/>
-                <a:ea typeface="Courier New" pitchFamily="34" charset="-122"/>
-                <a:cs typeface="Courier New" pitchFamily="34" charset="-120"/>
-              </a:rPr>
-              <a:t>intellioai.in   ·   github.com/KarthikRommula/livekit-voice-agent-workshop</a:t>
-            </a:r>
-            <a:endParaRPr lang="en-US" sz="1400" dirty="0"/>
-          </a:p>
-        </p:txBody>
-      </p:sp>
-    </p:spTree>
-    <p:extLst>
-      <p:ext uri="{BB962C8B-B14F-4D97-AF65-F5344CB8AC3E}">
-        <p14:creationId xmlns:p14="http://schemas.microsoft.com/office/powerpoint/2010/main" val="4138182316"/>
       </p:ext>
     </p:extLst>
   </p:cSld>
